--- a/Telephoto.pptx
+++ b/Telephoto.pptx
@@ -5958,13 +5958,13 @@
   <p:clrMapOvr>
     <a:masterClrMapping/>
   </p:clrMapOvr>
-  <mc:AlternateContent xmlns:mc="http://schemas.openxmlformats.org/markup-compatibility/2006">
-    <mc:Choice xmlns:p159="http://schemas.microsoft.com/office/powerpoint/2015/09/main" Requires="p159">
+  <mc:AlternateContent xmlns:mc="http://schemas.openxmlformats.org/markup-compatibility/2006" xmlns:p159="http://schemas.microsoft.com/office/powerpoint/2015/09/main">
+    <mc:Choice Requires="p159">
       <p:transition xmlns:p14="http://schemas.microsoft.com/office/powerpoint/2010/main" spd="slow" p14:dur="2000">
         <p159:morph option="byChar"/>
       </p:transition>
     </mc:Choice>
-    <mc:Fallback>
+    <mc:Fallback xmlns="">
       <p:transition spd="slow">
         <p:fade/>
       </p:transition>
@@ -6066,30 +6066,21 @@
                             </p:childTnLst>
                           </p:cTn>
                         </p:par>
-                      </p:childTnLst>
-                    </p:cTn>
-                  </p:par>
-                  <p:par>
-                    <p:cTn id="9" fill="hold">
-                      <p:stCondLst>
-                        <p:cond delay="indefinite"/>
-                      </p:stCondLst>
-                      <p:childTnLst>
                         <p:par>
-                          <p:cTn id="10" fill="hold">
+                          <p:cTn id="9" fill="hold">
                             <p:stCondLst>
-                              <p:cond delay="0"/>
+                              <p:cond delay="500"/>
                             </p:stCondLst>
                             <p:childTnLst>
                               <p:par>
-                                <p:cTn id="11" presetID="2" presetClass="entr" presetSubtype="2" fill="hold" grpId="0" nodeType="clickEffect">
+                                <p:cTn id="10" presetID="2" presetClass="entr" presetSubtype="2" fill="hold" grpId="0" nodeType="afterEffect">
                                   <p:stCondLst>
                                     <p:cond delay="0"/>
                                   </p:stCondLst>
                                   <p:childTnLst>
                                     <p:set>
                                       <p:cBhvr>
-                                        <p:cTn id="12" dur="1" fill="hold">
+                                        <p:cTn id="11" dur="1" fill="hold">
                                           <p:stCondLst>
                                             <p:cond delay="0"/>
                                           </p:stCondLst>
@@ -6107,7 +6098,7 @@
                                     </p:set>
                                     <p:anim calcmode="lin" valueType="num">
                                       <p:cBhvr additive="base">
-                                        <p:cTn id="13" dur="500" fill="hold"/>
+                                        <p:cTn id="12" dur="500" fill="hold"/>
                                         <p:tgtEl>
                                           <p:spTgt spid="15"/>
                                         </p:tgtEl>
@@ -6130,7 +6121,7 @@
                                     </p:anim>
                                     <p:anim calcmode="lin" valueType="num">
                                       <p:cBhvr additive="base">
-                                        <p:cTn id="14" dur="500" fill="hold"/>
+                                        <p:cTn id="13" dur="500" fill="hold"/>
                                         <p:tgtEl>
                                           <p:spTgt spid="15"/>
                                         </p:tgtEl>
@@ -6157,30 +6148,21 @@
                             </p:childTnLst>
                           </p:cTn>
                         </p:par>
-                      </p:childTnLst>
-                    </p:cTn>
-                  </p:par>
-                  <p:par>
-                    <p:cTn id="15" fill="hold">
-                      <p:stCondLst>
-                        <p:cond delay="indefinite"/>
-                      </p:stCondLst>
-                      <p:childTnLst>
                         <p:par>
-                          <p:cTn id="16" fill="hold">
+                          <p:cTn id="14" fill="hold">
                             <p:stCondLst>
-                              <p:cond delay="0"/>
+                              <p:cond delay="1000"/>
                             </p:stCondLst>
                             <p:childTnLst>
                               <p:par>
-                                <p:cTn id="17" presetID="2" presetClass="entr" presetSubtype="2" fill="hold" grpId="0" nodeType="clickEffect">
+                                <p:cTn id="15" presetID="2" presetClass="entr" presetSubtype="2" fill="hold" grpId="0" nodeType="afterEffect">
                                   <p:stCondLst>
                                     <p:cond delay="0"/>
                                   </p:stCondLst>
                                   <p:childTnLst>
                                     <p:set>
                                       <p:cBhvr>
-                                        <p:cTn id="18" dur="1" fill="hold">
+                                        <p:cTn id="16" dur="1" fill="hold">
                                           <p:stCondLst>
                                             <p:cond delay="0"/>
                                           </p:stCondLst>
@@ -6198,7 +6180,7 @@
                                     </p:set>
                                     <p:anim calcmode="lin" valueType="num">
                                       <p:cBhvr additive="base">
-                                        <p:cTn id="19" dur="500" fill="hold"/>
+                                        <p:cTn id="17" dur="500" fill="hold"/>
                                         <p:tgtEl>
                                           <p:spTgt spid="17"/>
                                         </p:tgtEl>
@@ -6221,7 +6203,7 @@
                                     </p:anim>
                                     <p:anim calcmode="lin" valueType="num">
                                       <p:cBhvr additive="base">
-                                        <p:cTn id="20" dur="500" fill="hold"/>
+                                        <p:cTn id="18" dur="500" fill="hold"/>
                                         <p:tgtEl>
                                           <p:spTgt spid="17"/>
                                         </p:tgtEl>
@@ -6248,30 +6230,21 @@
                             </p:childTnLst>
                           </p:cTn>
                         </p:par>
-                      </p:childTnLst>
-                    </p:cTn>
-                  </p:par>
-                  <p:par>
-                    <p:cTn id="21" fill="hold">
-                      <p:stCondLst>
-                        <p:cond delay="indefinite"/>
-                      </p:stCondLst>
-                      <p:childTnLst>
                         <p:par>
-                          <p:cTn id="22" fill="hold">
+                          <p:cTn id="19" fill="hold">
                             <p:stCondLst>
-                              <p:cond delay="0"/>
+                              <p:cond delay="1500"/>
                             </p:stCondLst>
                             <p:childTnLst>
                               <p:par>
-                                <p:cTn id="23" presetID="2" presetClass="entr" presetSubtype="2" fill="hold" grpId="0" nodeType="clickEffect">
+                                <p:cTn id="20" presetID="2" presetClass="entr" presetSubtype="2" fill="hold" grpId="0" nodeType="afterEffect">
                                   <p:stCondLst>
                                     <p:cond delay="0"/>
                                   </p:stCondLst>
                                   <p:childTnLst>
                                     <p:set>
                                       <p:cBhvr>
-                                        <p:cTn id="24" dur="1" fill="hold">
+                                        <p:cTn id="21" dur="1" fill="hold">
                                           <p:stCondLst>
                                             <p:cond delay="0"/>
                                           </p:stCondLst>
@@ -6289,7 +6262,7 @@
                                     </p:set>
                                     <p:anim calcmode="lin" valueType="num">
                                       <p:cBhvr additive="base">
-                                        <p:cTn id="25" dur="500" fill="hold"/>
+                                        <p:cTn id="22" dur="500" fill="hold"/>
                                         <p:tgtEl>
                                           <p:spTgt spid="28"/>
                                         </p:tgtEl>
@@ -6312,7 +6285,7 @@
                                     </p:anim>
                                     <p:anim calcmode="lin" valueType="num">
                                       <p:cBhvr additive="base">
-                                        <p:cTn id="26" dur="500" fill="hold"/>
+                                        <p:cTn id="23" dur="500" fill="hold"/>
                                         <p:tgtEl>
                                           <p:spTgt spid="28"/>
                                         </p:tgtEl>
@@ -6339,30 +6312,21 @@
                             </p:childTnLst>
                           </p:cTn>
                         </p:par>
-                      </p:childTnLst>
-                    </p:cTn>
-                  </p:par>
-                  <p:par>
-                    <p:cTn id="27" fill="hold">
-                      <p:stCondLst>
-                        <p:cond delay="indefinite"/>
-                      </p:stCondLst>
-                      <p:childTnLst>
                         <p:par>
-                          <p:cTn id="28" fill="hold">
+                          <p:cTn id="24" fill="hold">
                             <p:stCondLst>
-                              <p:cond delay="0"/>
+                              <p:cond delay="2000"/>
                             </p:stCondLst>
                             <p:childTnLst>
                               <p:par>
-                                <p:cTn id="29" presetID="2" presetClass="entr" presetSubtype="2" fill="hold" grpId="0" nodeType="clickEffect">
+                                <p:cTn id="25" presetID="2" presetClass="entr" presetSubtype="2" fill="hold" grpId="0" nodeType="afterEffect">
                                   <p:stCondLst>
                                     <p:cond delay="0"/>
                                   </p:stCondLst>
                                   <p:childTnLst>
                                     <p:set>
                                       <p:cBhvr>
-                                        <p:cTn id="30" dur="1" fill="hold">
+                                        <p:cTn id="26" dur="1" fill="hold">
                                           <p:stCondLst>
                                             <p:cond delay="0"/>
                                           </p:stCondLst>
@@ -6380,7 +6344,7 @@
                                     </p:set>
                                     <p:anim calcmode="lin" valueType="num">
                                       <p:cBhvr additive="base">
-                                        <p:cTn id="31" dur="500" fill="hold"/>
+                                        <p:cTn id="27" dur="500" fill="hold"/>
                                         <p:tgtEl>
                                           <p:spTgt spid="19"/>
                                         </p:tgtEl>
@@ -6403,7 +6367,7 @@
                                     </p:anim>
                                     <p:anim calcmode="lin" valueType="num">
                                       <p:cBhvr additive="base">
-                                        <p:cTn id="32" dur="500" fill="hold"/>
+                                        <p:cTn id="28" dur="500" fill="hold"/>
                                         <p:tgtEl>
                                           <p:spTgt spid="19"/>
                                         </p:tgtEl>
@@ -6430,30 +6394,21 @@
                             </p:childTnLst>
                           </p:cTn>
                         </p:par>
-                      </p:childTnLst>
-                    </p:cTn>
-                  </p:par>
-                  <p:par>
-                    <p:cTn id="33" fill="hold">
-                      <p:stCondLst>
-                        <p:cond delay="indefinite"/>
-                      </p:stCondLst>
-                      <p:childTnLst>
                         <p:par>
-                          <p:cTn id="34" fill="hold">
+                          <p:cTn id="29" fill="hold">
                             <p:stCondLst>
-                              <p:cond delay="0"/>
+                              <p:cond delay="2500"/>
                             </p:stCondLst>
                             <p:childTnLst>
                               <p:par>
-                                <p:cTn id="35" presetID="2" presetClass="entr" presetSubtype="2" fill="hold" grpId="0" nodeType="clickEffect">
+                                <p:cTn id="30" presetID="2" presetClass="entr" presetSubtype="2" fill="hold" grpId="0" nodeType="afterEffect">
                                   <p:stCondLst>
                                     <p:cond delay="0"/>
                                   </p:stCondLst>
                                   <p:childTnLst>
                                     <p:set>
                                       <p:cBhvr>
-                                        <p:cTn id="36" dur="1" fill="hold">
+                                        <p:cTn id="31" dur="1" fill="hold">
                                           <p:stCondLst>
                                             <p:cond delay="0"/>
                                           </p:stCondLst>
@@ -6471,7 +6426,7 @@
                                     </p:set>
                                     <p:anim calcmode="lin" valueType="num">
                                       <p:cBhvr additive="base">
-                                        <p:cTn id="37" dur="500" fill="hold"/>
+                                        <p:cTn id="32" dur="500" fill="hold"/>
                                         <p:tgtEl>
                                           <p:spTgt spid="21"/>
                                         </p:tgtEl>
@@ -6494,7 +6449,7 @@
                                     </p:anim>
                                     <p:anim calcmode="lin" valueType="num">
                                       <p:cBhvr additive="base">
-                                        <p:cTn id="38" dur="500" fill="hold"/>
+                                        <p:cTn id="33" dur="500" fill="hold"/>
                                         <p:tgtEl>
                                           <p:spTgt spid="21"/>
                                         </p:tgtEl>
@@ -6953,13 +6908,13 @@
   <p:clrMapOvr>
     <a:masterClrMapping/>
   </p:clrMapOvr>
-  <mc:AlternateContent xmlns:mc="http://schemas.openxmlformats.org/markup-compatibility/2006">
-    <mc:Choice xmlns:p159="http://schemas.microsoft.com/office/powerpoint/2015/09/main" Requires="p159">
+  <mc:AlternateContent xmlns:mc="http://schemas.openxmlformats.org/markup-compatibility/2006" xmlns:p159="http://schemas.microsoft.com/office/powerpoint/2015/09/main">
+    <mc:Choice Requires="p159">
       <p:transition xmlns:p14="http://schemas.microsoft.com/office/powerpoint/2010/main" spd="slow" p14:dur="2000">
         <p159:morph option="byChar"/>
       </p:transition>
     </mc:Choice>
-    <mc:Fallback>
+    <mc:Fallback xmlns="">
       <p:transition spd="slow">
         <p:fade/>
       </p:transition>
@@ -6977,9 +6932,6 @@
                     <p:cTn id="3" fill="hold">
                       <p:stCondLst>
                         <p:cond delay="indefinite"/>
-                        <p:cond evt="onBegin" delay="0">
-                          <p:tn val="2"/>
-                        </p:cond>
                       </p:stCondLst>
                       <p:childTnLst>
                         <p:par>
@@ -6989,7 +6941,7 @@
                             </p:stCondLst>
                             <p:childTnLst>
                               <p:par>
-                                <p:cTn id="5" presetID="1" presetClass="entr" presetSubtype="0" fill="hold" nodeType="afterEffect">
+                                <p:cTn id="5" presetID="42" presetClass="entr" presetSubtype="0" fill="hold" nodeType="clickEffect">
                                   <p:stCondLst>
                                     <p:cond delay="0"/>
                                   </p:stCondLst>
@@ -7002,7 +6954,7 @@
                                           </p:stCondLst>
                                         </p:cTn>
                                         <p:tgtEl>
-                                          <p:spTgt spid="3">
+                                          <p:spTgt spid="13">
                                             <p:txEl>
                                               <p:pRg st="0" end="0"/>
                                             </p:txEl>
@@ -7016,46 +6968,72 @@
                                         <p:strVal val="visible"/>
                                       </p:to>
                                     </p:set>
-                                  </p:childTnLst>
-                                </p:cTn>
-                              </p:par>
-                            </p:childTnLst>
-                          </p:cTn>
-                        </p:par>
-                        <p:par>
-                          <p:cTn id="7" fill="hold">
-                            <p:stCondLst>
-                              <p:cond delay="0"/>
-                            </p:stCondLst>
-                            <p:childTnLst>
-                              <p:par>
-                                <p:cTn id="8" presetID="1" presetClass="entr" presetSubtype="0" fill="hold" nodeType="afterEffect">
-                                  <p:stCondLst>
-                                    <p:cond delay="0"/>
-                                  </p:stCondLst>
-                                  <p:childTnLst>
-                                    <p:set>
+                                    <p:animEffect transition="in" filter="fade">
                                       <p:cBhvr>
-                                        <p:cTn id="9" dur="1" fill="hold">
-                                          <p:stCondLst>
-                                            <p:cond delay="0"/>
-                                          </p:stCondLst>
-                                        </p:cTn>
-                                        <p:tgtEl>
-                                          <p:spTgt spid="5">
+                                        <p:cTn id="7" dur="1000"/>
+                                        <p:tgtEl>
+                                          <p:spTgt spid="13">
                                             <p:txEl>
                                               <p:pRg st="0" end="0"/>
                                             </p:txEl>
                                           </p:spTgt>
                                         </p:tgtEl>
-                                        <p:attrNameLst>
-                                          <p:attrName>style.visibility</p:attrName>
-                                        </p:attrNameLst>
-                                      </p:cBhvr>
-                                      <p:to>
-                                        <p:strVal val="visible"/>
-                                      </p:to>
-                                    </p:set>
+                                      </p:cBhvr>
+                                    </p:animEffect>
+                                    <p:anim calcmode="lin" valueType="num">
+                                      <p:cBhvr>
+                                        <p:cTn id="8" dur="1000" fill="hold"/>
+                                        <p:tgtEl>
+                                          <p:spTgt spid="13">
+                                            <p:txEl>
+                                              <p:pRg st="0" end="0"/>
+                                            </p:txEl>
+                                          </p:spTgt>
+                                        </p:tgtEl>
+                                        <p:attrNameLst>
+                                          <p:attrName>ppt_x</p:attrName>
+                                        </p:attrNameLst>
+                                      </p:cBhvr>
+                                      <p:tavLst>
+                                        <p:tav tm="0">
+                                          <p:val>
+                                            <p:strVal val="#ppt_x"/>
+                                          </p:val>
+                                        </p:tav>
+                                        <p:tav tm="100000">
+                                          <p:val>
+                                            <p:strVal val="#ppt_x"/>
+                                          </p:val>
+                                        </p:tav>
+                                      </p:tavLst>
+                                    </p:anim>
+                                    <p:anim calcmode="lin" valueType="num">
+                                      <p:cBhvr>
+                                        <p:cTn id="9" dur="1000" fill="hold"/>
+                                        <p:tgtEl>
+                                          <p:spTgt spid="13">
+                                            <p:txEl>
+                                              <p:pRg st="0" end="0"/>
+                                            </p:txEl>
+                                          </p:spTgt>
+                                        </p:tgtEl>
+                                        <p:attrNameLst>
+                                          <p:attrName>ppt_y</p:attrName>
+                                        </p:attrNameLst>
+                                      </p:cBhvr>
+                                      <p:tavLst>
+                                        <p:tav tm="0">
+                                          <p:val>
+                                            <p:strVal val="#ppt_y+.1"/>
+                                          </p:val>
+                                        </p:tav>
+                                        <p:tav tm="100000">
+                                          <p:val>
+                                            <p:strVal val="#ppt_y"/>
+                                          </p:val>
+                                        </p:tav>
+                                      </p:tavLst>
+                                    </p:anim>
                                   </p:childTnLst>
                                 </p:cTn>
                               </p:par>
@@ -7065,11 +7043,11 @@
                         <p:par>
                           <p:cTn id="10" fill="hold">
                             <p:stCondLst>
-                              <p:cond delay="0"/>
+                              <p:cond delay="1000"/>
                             </p:stCondLst>
                             <p:childTnLst>
                               <p:par>
-                                <p:cTn id="11" presetID="1" presetClass="entr" presetSubtype="0" fill="hold" nodeType="afterEffect">
+                                <p:cTn id="11" presetID="42" presetClass="entr" presetSubtype="0" fill="hold" nodeType="afterEffect">
                                   <p:stCondLst>
                                     <p:cond delay="0"/>
                                   </p:stCondLst>
@@ -7082,7 +7060,7 @@
                                           </p:stCondLst>
                                         </p:cTn>
                                         <p:tgtEl>
-                                          <p:spTgt spid="13">
+                                          <p:spTgt spid="15">
                                             <p:txEl>
                                               <p:pRg st="0" end="0"/>
                                             </p:txEl>
@@ -7096,6 +7074,72 @@
                                         <p:strVal val="visible"/>
                                       </p:to>
                                     </p:set>
+                                    <p:animEffect transition="in" filter="fade">
+                                      <p:cBhvr>
+                                        <p:cTn id="13" dur="1000"/>
+                                        <p:tgtEl>
+                                          <p:spTgt spid="15">
+                                            <p:txEl>
+                                              <p:pRg st="0" end="0"/>
+                                            </p:txEl>
+                                          </p:spTgt>
+                                        </p:tgtEl>
+                                      </p:cBhvr>
+                                    </p:animEffect>
+                                    <p:anim calcmode="lin" valueType="num">
+                                      <p:cBhvr>
+                                        <p:cTn id="14" dur="1000" fill="hold"/>
+                                        <p:tgtEl>
+                                          <p:spTgt spid="15">
+                                            <p:txEl>
+                                              <p:pRg st="0" end="0"/>
+                                            </p:txEl>
+                                          </p:spTgt>
+                                        </p:tgtEl>
+                                        <p:attrNameLst>
+                                          <p:attrName>ppt_x</p:attrName>
+                                        </p:attrNameLst>
+                                      </p:cBhvr>
+                                      <p:tavLst>
+                                        <p:tav tm="0">
+                                          <p:val>
+                                            <p:strVal val="#ppt_x"/>
+                                          </p:val>
+                                        </p:tav>
+                                        <p:tav tm="100000">
+                                          <p:val>
+                                            <p:strVal val="#ppt_x"/>
+                                          </p:val>
+                                        </p:tav>
+                                      </p:tavLst>
+                                    </p:anim>
+                                    <p:anim calcmode="lin" valueType="num">
+                                      <p:cBhvr>
+                                        <p:cTn id="15" dur="1000" fill="hold"/>
+                                        <p:tgtEl>
+                                          <p:spTgt spid="15">
+                                            <p:txEl>
+                                              <p:pRg st="0" end="0"/>
+                                            </p:txEl>
+                                          </p:spTgt>
+                                        </p:tgtEl>
+                                        <p:attrNameLst>
+                                          <p:attrName>ppt_y</p:attrName>
+                                        </p:attrNameLst>
+                                      </p:cBhvr>
+                                      <p:tavLst>
+                                        <p:tav tm="0">
+                                          <p:val>
+                                            <p:strVal val="#ppt_y+.1"/>
+                                          </p:val>
+                                        </p:tav>
+                                        <p:tav tm="100000">
+                                          <p:val>
+                                            <p:strVal val="#ppt_y"/>
+                                          </p:val>
+                                        </p:tav>
+                                      </p:tavLst>
+                                    </p:anim>
                                   </p:childTnLst>
                                 </p:cTn>
                               </p:par>
@@ -7103,26 +7147,26 @@
                           </p:cTn>
                         </p:par>
                         <p:par>
-                          <p:cTn id="13" fill="hold">
+                          <p:cTn id="16" fill="hold">
                             <p:stCondLst>
-                              <p:cond delay="0"/>
+                              <p:cond delay="2000"/>
                             </p:stCondLst>
                             <p:childTnLst>
                               <p:par>
-                                <p:cTn id="14" presetID="1" presetClass="entr" presetSubtype="0" fill="hold" nodeType="afterEffect">
+                                <p:cTn id="17" presetID="42" presetClass="entr" presetSubtype="0" fill="hold" nodeType="afterEffect">
                                   <p:stCondLst>
                                     <p:cond delay="0"/>
                                   </p:stCondLst>
                                   <p:childTnLst>
                                     <p:set>
                                       <p:cBhvr>
-                                        <p:cTn id="15" dur="1" fill="hold">
+                                        <p:cTn id="18" dur="1" fill="hold">
                                           <p:stCondLst>
                                             <p:cond delay="0"/>
                                           </p:stCondLst>
                                         </p:cTn>
                                         <p:tgtEl>
-                                          <p:spTgt spid="15">
+                                          <p:spTgt spid="5">
                                             <p:txEl>
                                               <p:pRg st="0" end="0"/>
                                             </p:txEl>
@@ -7136,6 +7180,178 @@
                                         <p:strVal val="visible"/>
                                       </p:to>
                                     </p:set>
+                                    <p:animEffect transition="in" filter="fade">
+                                      <p:cBhvr>
+                                        <p:cTn id="19" dur="1000"/>
+                                        <p:tgtEl>
+                                          <p:spTgt spid="5">
+                                            <p:txEl>
+                                              <p:pRg st="0" end="0"/>
+                                            </p:txEl>
+                                          </p:spTgt>
+                                        </p:tgtEl>
+                                      </p:cBhvr>
+                                    </p:animEffect>
+                                    <p:anim calcmode="lin" valueType="num">
+                                      <p:cBhvr>
+                                        <p:cTn id="20" dur="1000" fill="hold"/>
+                                        <p:tgtEl>
+                                          <p:spTgt spid="5">
+                                            <p:txEl>
+                                              <p:pRg st="0" end="0"/>
+                                            </p:txEl>
+                                          </p:spTgt>
+                                        </p:tgtEl>
+                                        <p:attrNameLst>
+                                          <p:attrName>ppt_x</p:attrName>
+                                        </p:attrNameLst>
+                                      </p:cBhvr>
+                                      <p:tavLst>
+                                        <p:tav tm="0">
+                                          <p:val>
+                                            <p:strVal val="#ppt_x"/>
+                                          </p:val>
+                                        </p:tav>
+                                        <p:tav tm="100000">
+                                          <p:val>
+                                            <p:strVal val="#ppt_x"/>
+                                          </p:val>
+                                        </p:tav>
+                                      </p:tavLst>
+                                    </p:anim>
+                                    <p:anim calcmode="lin" valueType="num">
+                                      <p:cBhvr>
+                                        <p:cTn id="21" dur="1000" fill="hold"/>
+                                        <p:tgtEl>
+                                          <p:spTgt spid="5">
+                                            <p:txEl>
+                                              <p:pRg st="0" end="0"/>
+                                            </p:txEl>
+                                          </p:spTgt>
+                                        </p:tgtEl>
+                                        <p:attrNameLst>
+                                          <p:attrName>ppt_y</p:attrName>
+                                        </p:attrNameLst>
+                                      </p:cBhvr>
+                                      <p:tavLst>
+                                        <p:tav tm="0">
+                                          <p:val>
+                                            <p:strVal val="#ppt_y+.1"/>
+                                          </p:val>
+                                        </p:tav>
+                                        <p:tav tm="100000">
+                                          <p:val>
+                                            <p:strVal val="#ppt_y"/>
+                                          </p:val>
+                                        </p:tav>
+                                      </p:tavLst>
+                                    </p:anim>
+                                  </p:childTnLst>
+                                </p:cTn>
+                              </p:par>
+                            </p:childTnLst>
+                          </p:cTn>
+                        </p:par>
+                        <p:par>
+                          <p:cTn id="22" fill="hold">
+                            <p:stCondLst>
+                              <p:cond delay="3000"/>
+                            </p:stCondLst>
+                            <p:childTnLst>
+                              <p:par>
+                                <p:cTn id="23" presetID="42" presetClass="entr" presetSubtype="0" fill="hold" nodeType="afterEffect">
+                                  <p:stCondLst>
+                                    <p:cond delay="0"/>
+                                  </p:stCondLst>
+                                  <p:childTnLst>
+                                    <p:set>
+                                      <p:cBhvr>
+                                        <p:cTn id="24" dur="1" fill="hold">
+                                          <p:stCondLst>
+                                            <p:cond delay="0"/>
+                                          </p:stCondLst>
+                                        </p:cTn>
+                                        <p:tgtEl>
+                                          <p:spTgt spid="3">
+                                            <p:txEl>
+                                              <p:pRg st="0" end="0"/>
+                                            </p:txEl>
+                                          </p:spTgt>
+                                        </p:tgtEl>
+                                        <p:attrNameLst>
+                                          <p:attrName>style.visibility</p:attrName>
+                                        </p:attrNameLst>
+                                      </p:cBhvr>
+                                      <p:to>
+                                        <p:strVal val="visible"/>
+                                      </p:to>
+                                    </p:set>
+                                    <p:animEffect transition="in" filter="fade">
+                                      <p:cBhvr>
+                                        <p:cTn id="25" dur="1000"/>
+                                        <p:tgtEl>
+                                          <p:spTgt spid="3">
+                                            <p:txEl>
+                                              <p:pRg st="0" end="0"/>
+                                            </p:txEl>
+                                          </p:spTgt>
+                                        </p:tgtEl>
+                                      </p:cBhvr>
+                                    </p:animEffect>
+                                    <p:anim calcmode="lin" valueType="num">
+                                      <p:cBhvr>
+                                        <p:cTn id="26" dur="1000" fill="hold"/>
+                                        <p:tgtEl>
+                                          <p:spTgt spid="3">
+                                            <p:txEl>
+                                              <p:pRg st="0" end="0"/>
+                                            </p:txEl>
+                                          </p:spTgt>
+                                        </p:tgtEl>
+                                        <p:attrNameLst>
+                                          <p:attrName>ppt_x</p:attrName>
+                                        </p:attrNameLst>
+                                      </p:cBhvr>
+                                      <p:tavLst>
+                                        <p:tav tm="0">
+                                          <p:val>
+                                            <p:strVal val="#ppt_x"/>
+                                          </p:val>
+                                        </p:tav>
+                                        <p:tav tm="100000">
+                                          <p:val>
+                                            <p:strVal val="#ppt_x"/>
+                                          </p:val>
+                                        </p:tav>
+                                      </p:tavLst>
+                                    </p:anim>
+                                    <p:anim calcmode="lin" valueType="num">
+                                      <p:cBhvr>
+                                        <p:cTn id="27" dur="1000" fill="hold"/>
+                                        <p:tgtEl>
+                                          <p:spTgt spid="3">
+                                            <p:txEl>
+                                              <p:pRg st="0" end="0"/>
+                                            </p:txEl>
+                                          </p:spTgt>
+                                        </p:tgtEl>
+                                        <p:attrNameLst>
+                                          <p:attrName>ppt_y</p:attrName>
+                                        </p:attrNameLst>
+                                      </p:cBhvr>
+                                      <p:tavLst>
+                                        <p:tav tm="0">
+                                          <p:val>
+                                            <p:strVal val="#ppt_y+.1"/>
+                                          </p:val>
+                                        </p:tav>
+                                        <p:tav tm="100000">
+                                          <p:val>
+                                            <p:strVal val="#ppt_y"/>
+                                          </p:val>
+                                        </p:tav>
+                                      </p:tavLst>
+                                    </p:anim>
                                   </p:childTnLst>
                                 </p:cTn>
                               </p:par>
@@ -7743,7 +7959,7 @@
                 </a:solidFill>
                 <a:latin typeface="Book Antiqua" panose="02040602050305030304" pitchFamily="18" charset="0"/>
               </a:rPr>
-              <a:t>Posztok sorba rendezése</a:t>
+              <a:t>Posztok rendezése</a:t>
             </a:r>
           </a:p>
           <a:p>
@@ -7867,6 +8083,65 @@
           </a:p>
         </p:txBody>
       </p:sp>
+      <p:sp>
+        <p:nvSpPr>
+          <p:cNvPr id="37" name="Szövegdoboz 36">
+            <a:extLst>
+              <a:ext uri="{FF2B5EF4-FFF2-40B4-BE49-F238E27FC236}">
+                <a16:creationId xmlns:a16="http://schemas.microsoft.com/office/drawing/2014/main" id="{98432AD3-A0ED-A77F-8F31-6C6879EF55C7}"/>
+              </a:ext>
+            </a:extLst>
+          </p:cNvPr>
+          <p:cNvSpPr txBox="1"/>
+          <p:nvPr/>
+        </p:nvSpPr>
+        <p:spPr>
+          <a:xfrm>
+            <a:off x="4727512" y="4819718"/>
+            <a:ext cx="3724204" cy="1569660"/>
+          </a:xfrm>
+          <a:prstGeom prst="rect">
+            <a:avLst/>
+          </a:prstGeom>
+          <a:noFill/>
+        </p:spPr>
+        <p:txBody>
+          <a:bodyPr wrap="square" rtlCol="0">
+            <a:spAutoFit/>
+          </a:bodyPr>
+          <a:lstStyle/>
+          <a:p>
+            <a:pPr marL="457200" indent="-180000" algn="ctr">
+              <a:buFont typeface="Arial" panose="020B0604020202020204" pitchFamily="34" charset="0"/>
+              <a:buChar char="•"/>
+            </a:pPr>
+            <a:r>
+              <a:rPr lang="hu-HU" sz="2400" dirty="0">
+                <a:solidFill>
+                  <a:srgbClr val="DCDCCD"/>
+                </a:solidFill>
+                <a:latin typeface="Book Antiqua" panose="02040602050305030304" pitchFamily="18" charset="0"/>
+              </a:rPr>
+              <a:t>Aktivitási grafikon</a:t>
+            </a:r>
+          </a:p>
+          <a:p>
+            <a:pPr marL="457200" indent="-180000" algn="ctr">
+              <a:buFont typeface="Arial" panose="020B0604020202020204" pitchFamily="34" charset="0"/>
+              <a:buChar char="•"/>
+            </a:pPr>
+            <a:r>
+              <a:rPr lang="hu-HU" sz="2400" dirty="0">
+                <a:solidFill>
+                  <a:srgbClr val="DCDCCD"/>
+                </a:solidFill>
+                <a:latin typeface="Book Antiqua" panose="02040602050305030304" pitchFamily="18" charset="0"/>
+              </a:rPr>
+              <a:t>Felhasználók / Posztok / Kommentek moderálása</a:t>
+            </a:r>
+          </a:p>
+        </p:txBody>
+      </p:sp>
       <p:cxnSp>
         <p:nvCxnSpPr>
           <p:cNvPr id="30" name="Egyenes összekötő 29">
@@ -7908,65 +8183,6 @@
           </a:fontRef>
         </p:style>
       </p:cxnSp>
-      <p:sp>
-        <p:nvSpPr>
-          <p:cNvPr id="37" name="Szövegdoboz 36">
-            <a:extLst>
-              <a:ext uri="{FF2B5EF4-FFF2-40B4-BE49-F238E27FC236}">
-                <a16:creationId xmlns:a16="http://schemas.microsoft.com/office/drawing/2014/main" id="{98432AD3-A0ED-A77F-8F31-6C6879EF55C7}"/>
-              </a:ext>
-            </a:extLst>
-          </p:cNvPr>
-          <p:cNvSpPr txBox="1"/>
-          <p:nvPr/>
-        </p:nvSpPr>
-        <p:spPr>
-          <a:xfrm>
-            <a:off x="4727512" y="4819718"/>
-            <a:ext cx="3724204" cy="1569660"/>
-          </a:xfrm>
-          <a:prstGeom prst="rect">
-            <a:avLst/>
-          </a:prstGeom>
-          <a:noFill/>
-        </p:spPr>
-        <p:txBody>
-          <a:bodyPr wrap="square" rtlCol="0">
-            <a:spAutoFit/>
-          </a:bodyPr>
-          <a:lstStyle/>
-          <a:p>
-            <a:pPr marL="457200" indent="-180000" algn="ctr">
-              <a:buFont typeface="Arial" panose="020B0604020202020204" pitchFamily="34" charset="0"/>
-              <a:buChar char="•"/>
-            </a:pPr>
-            <a:r>
-              <a:rPr lang="hu-HU" sz="2400" dirty="0">
-                <a:solidFill>
-                  <a:srgbClr val="DCDCCD"/>
-                </a:solidFill>
-                <a:latin typeface="Book Antiqua" panose="02040602050305030304" pitchFamily="18" charset="0"/>
-              </a:rPr>
-              <a:t>Aktivitási grafikon</a:t>
-            </a:r>
-          </a:p>
-          <a:p>
-            <a:pPr marL="457200" indent="-180000" algn="ctr">
-              <a:buFont typeface="Arial" panose="020B0604020202020204" pitchFamily="34" charset="0"/>
-              <a:buChar char="•"/>
-            </a:pPr>
-            <a:r>
-              <a:rPr lang="hu-HU" sz="2400" dirty="0">
-                <a:solidFill>
-                  <a:srgbClr val="DCDCCD"/>
-                </a:solidFill>
-                <a:latin typeface="Book Antiqua" panose="02040602050305030304" pitchFamily="18" charset="0"/>
-              </a:rPr>
-              <a:t>Felhasználók / Posztok / Kommentek moderálása</a:t>
-            </a:r>
-          </a:p>
-        </p:txBody>
-      </p:sp>
       <p:sp>
         <p:nvSpPr>
           <p:cNvPr id="11" name="!!Cím">
@@ -8037,18 +8253,1138 @@
   <p:clrMapOvr>
     <a:masterClrMapping/>
   </p:clrMapOvr>
-  <mc:AlternateContent xmlns:mc="http://schemas.openxmlformats.org/markup-compatibility/2006">
-    <mc:Choice xmlns:p159="http://schemas.microsoft.com/office/powerpoint/2015/09/main" Requires="p159">
+  <mc:AlternateContent xmlns:mc="http://schemas.openxmlformats.org/markup-compatibility/2006" xmlns:p159="http://schemas.microsoft.com/office/powerpoint/2015/09/main">
+    <mc:Choice Requires="p159">
       <p:transition xmlns:p14="http://schemas.microsoft.com/office/powerpoint/2010/main" spd="slow" p14:dur="2000">
         <p159:morph option="byChar"/>
       </p:transition>
     </mc:Choice>
-    <mc:Fallback>
+    <mc:Fallback xmlns="">
       <p:transition spd="slow">
         <p:fade/>
       </p:transition>
     </mc:Fallback>
   </mc:AlternateContent>
+  <p:timing>
+    <p:tnLst>
+      <p:par>
+        <p:cTn id="1" dur="indefinite" restart="never" nodeType="tmRoot">
+          <p:childTnLst>
+            <p:seq concurrent="1" nextAc="seek">
+              <p:cTn id="2" dur="indefinite" nodeType="mainSeq">
+                <p:childTnLst>
+                  <p:par>
+                    <p:cTn id="3" fill="hold">
+                      <p:stCondLst>
+                        <p:cond delay="indefinite"/>
+                      </p:stCondLst>
+                      <p:childTnLst>
+                        <p:par>
+                          <p:cTn id="4" fill="hold">
+                            <p:stCondLst>
+                              <p:cond delay="0"/>
+                            </p:stCondLst>
+                            <p:childTnLst>
+                              <p:par>
+                                <p:cTn id="5" presetID="10" presetClass="entr" presetSubtype="0" fill="hold" nodeType="clickEffect">
+                                  <p:stCondLst>
+                                    <p:cond delay="0"/>
+                                  </p:stCondLst>
+                                  <p:childTnLst>
+                                    <p:set>
+                                      <p:cBhvr>
+                                        <p:cTn id="6" dur="1" fill="hold">
+                                          <p:stCondLst>
+                                            <p:cond delay="0"/>
+                                          </p:stCondLst>
+                                        </p:cTn>
+                                        <p:tgtEl>
+                                          <p:spTgt spid="13">
+                                            <p:txEl>
+                                              <p:pRg st="0" end="0"/>
+                                            </p:txEl>
+                                          </p:spTgt>
+                                        </p:tgtEl>
+                                        <p:attrNameLst>
+                                          <p:attrName>style.visibility</p:attrName>
+                                        </p:attrNameLst>
+                                      </p:cBhvr>
+                                      <p:to>
+                                        <p:strVal val="visible"/>
+                                      </p:to>
+                                    </p:set>
+                                    <p:animEffect transition="in" filter="fade">
+                                      <p:cBhvr>
+                                        <p:cTn id="7" dur="500"/>
+                                        <p:tgtEl>
+                                          <p:spTgt spid="13">
+                                            <p:txEl>
+                                              <p:pRg st="0" end="0"/>
+                                            </p:txEl>
+                                          </p:spTgt>
+                                        </p:tgtEl>
+                                      </p:cBhvr>
+                                    </p:animEffect>
+                                  </p:childTnLst>
+                                </p:cTn>
+                              </p:par>
+                            </p:childTnLst>
+                          </p:cTn>
+                        </p:par>
+                        <p:par>
+                          <p:cTn id="8" fill="hold">
+                            <p:stCondLst>
+                              <p:cond delay="500"/>
+                            </p:stCondLst>
+                            <p:childTnLst>
+                              <p:par>
+                                <p:cTn id="9" presetID="2" presetClass="entr" presetSubtype="8" fill="hold" nodeType="afterEffect">
+                                  <p:stCondLst>
+                                    <p:cond delay="0"/>
+                                  </p:stCondLst>
+                                  <p:childTnLst>
+                                    <p:set>
+                                      <p:cBhvr>
+                                        <p:cTn id="10" dur="1" fill="hold">
+                                          <p:stCondLst>
+                                            <p:cond delay="0"/>
+                                          </p:stCondLst>
+                                        </p:cTn>
+                                        <p:tgtEl>
+                                          <p:spTgt spid="36">
+                                            <p:txEl>
+                                              <p:pRg st="0" end="0"/>
+                                            </p:txEl>
+                                          </p:spTgt>
+                                        </p:tgtEl>
+                                        <p:attrNameLst>
+                                          <p:attrName>style.visibility</p:attrName>
+                                        </p:attrNameLst>
+                                      </p:cBhvr>
+                                      <p:to>
+                                        <p:strVal val="visible"/>
+                                      </p:to>
+                                    </p:set>
+                                    <p:anim calcmode="lin" valueType="num">
+                                      <p:cBhvr additive="base">
+                                        <p:cTn id="11" dur="500" fill="hold"/>
+                                        <p:tgtEl>
+                                          <p:spTgt spid="36">
+                                            <p:txEl>
+                                              <p:pRg st="0" end="0"/>
+                                            </p:txEl>
+                                          </p:spTgt>
+                                        </p:tgtEl>
+                                        <p:attrNameLst>
+                                          <p:attrName>ppt_x</p:attrName>
+                                        </p:attrNameLst>
+                                      </p:cBhvr>
+                                      <p:tavLst>
+                                        <p:tav tm="0">
+                                          <p:val>
+                                            <p:strVal val="0-#ppt_w/2"/>
+                                          </p:val>
+                                        </p:tav>
+                                        <p:tav tm="100000">
+                                          <p:val>
+                                            <p:strVal val="#ppt_x"/>
+                                          </p:val>
+                                        </p:tav>
+                                      </p:tavLst>
+                                    </p:anim>
+                                    <p:anim calcmode="lin" valueType="num">
+                                      <p:cBhvr additive="base">
+                                        <p:cTn id="12" dur="500" fill="hold"/>
+                                        <p:tgtEl>
+                                          <p:spTgt spid="36">
+                                            <p:txEl>
+                                              <p:pRg st="0" end="0"/>
+                                            </p:txEl>
+                                          </p:spTgt>
+                                        </p:tgtEl>
+                                        <p:attrNameLst>
+                                          <p:attrName>ppt_y</p:attrName>
+                                        </p:attrNameLst>
+                                      </p:cBhvr>
+                                      <p:tavLst>
+                                        <p:tav tm="0">
+                                          <p:val>
+                                            <p:strVal val="#ppt_y"/>
+                                          </p:val>
+                                        </p:tav>
+                                        <p:tav tm="100000">
+                                          <p:val>
+                                            <p:strVal val="#ppt_y"/>
+                                          </p:val>
+                                        </p:tav>
+                                      </p:tavLst>
+                                    </p:anim>
+                                  </p:childTnLst>
+                                </p:cTn>
+                              </p:par>
+                            </p:childTnLst>
+                          </p:cTn>
+                        </p:par>
+                        <p:par>
+                          <p:cTn id="13" fill="hold">
+                            <p:stCondLst>
+                              <p:cond delay="1000"/>
+                            </p:stCondLst>
+                            <p:childTnLst>
+                              <p:par>
+                                <p:cTn id="14" presetID="2" presetClass="entr" presetSubtype="8" fill="hold" nodeType="afterEffect">
+                                  <p:stCondLst>
+                                    <p:cond delay="0"/>
+                                  </p:stCondLst>
+                                  <p:childTnLst>
+                                    <p:set>
+                                      <p:cBhvr>
+                                        <p:cTn id="15" dur="1" fill="hold">
+                                          <p:stCondLst>
+                                            <p:cond delay="0"/>
+                                          </p:stCondLst>
+                                        </p:cTn>
+                                        <p:tgtEl>
+                                          <p:spTgt spid="36">
+                                            <p:txEl>
+                                              <p:pRg st="1" end="1"/>
+                                            </p:txEl>
+                                          </p:spTgt>
+                                        </p:tgtEl>
+                                        <p:attrNameLst>
+                                          <p:attrName>style.visibility</p:attrName>
+                                        </p:attrNameLst>
+                                      </p:cBhvr>
+                                      <p:to>
+                                        <p:strVal val="visible"/>
+                                      </p:to>
+                                    </p:set>
+                                    <p:anim calcmode="lin" valueType="num">
+                                      <p:cBhvr additive="base">
+                                        <p:cTn id="16" dur="500" fill="hold"/>
+                                        <p:tgtEl>
+                                          <p:spTgt spid="36">
+                                            <p:txEl>
+                                              <p:pRg st="1" end="1"/>
+                                            </p:txEl>
+                                          </p:spTgt>
+                                        </p:tgtEl>
+                                        <p:attrNameLst>
+                                          <p:attrName>ppt_x</p:attrName>
+                                        </p:attrNameLst>
+                                      </p:cBhvr>
+                                      <p:tavLst>
+                                        <p:tav tm="0">
+                                          <p:val>
+                                            <p:strVal val="0-#ppt_w/2"/>
+                                          </p:val>
+                                        </p:tav>
+                                        <p:tav tm="100000">
+                                          <p:val>
+                                            <p:strVal val="#ppt_x"/>
+                                          </p:val>
+                                        </p:tav>
+                                      </p:tavLst>
+                                    </p:anim>
+                                    <p:anim calcmode="lin" valueType="num">
+                                      <p:cBhvr additive="base">
+                                        <p:cTn id="17" dur="500" fill="hold"/>
+                                        <p:tgtEl>
+                                          <p:spTgt spid="36">
+                                            <p:txEl>
+                                              <p:pRg st="1" end="1"/>
+                                            </p:txEl>
+                                          </p:spTgt>
+                                        </p:tgtEl>
+                                        <p:attrNameLst>
+                                          <p:attrName>ppt_y</p:attrName>
+                                        </p:attrNameLst>
+                                      </p:cBhvr>
+                                      <p:tavLst>
+                                        <p:tav tm="0">
+                                          <p:val>
+                                            <p:strVal val="#ppt_y"/>
+                                          </p:val>
+                                        </p:tav>
+                                        <p:tav tm="100000">
+                                          <p:val>
+                                            <p:strVal val="#ppt_y"/>
+                                          </p:val>
+                                        </p:tav>
+                                      </p:tavLst>
+                                    </p:anim>
+                                  </p:childTnLst>
+                                </p:cTn>
+                              </p:par>
+                            </p:childTnLst>
+                          </p:cTn>
+                        </p:par>
+                        <p:par>
+                          <p:cTn id="18" fill="hold">
+                            <p:stCondLst>
+                              <p:cond delay="1500"/>
+                            </p:stCondLst>
+                            <p:childTnLst>
+                              <p:par>
+                                <p:cTn id="19" presetID="2" presetClass="entr" presetSubtype="8" fill="hold" nodeType="afterEffect">
+                                  <p:stCondLst>
+                                    <p:cond delay="0"/>
+                                  </p:stCondLst>
+                                  <p:childTnLst>
+                                    <p:set>
+                                      <p:cBhvr>
+                                        <p:cTn id="20" dur="1" fill="hold">
+                                          <p:stCondLst>
+                                            <p:cond delay="0"/>
+                                          </p:stCondLst>
+                                        </p:cTn>
+                                        <p:tgtEl>
+                                          <p:spTgt spid="36">
+                                            <p:txEl>
+                                              <p:pRg st="2" end="2"/>
+                                            </p:txEl>
+                                          </p:spTgt>
+                                        </p:tgtEl>
+                                        <p:attrNameLst>
+                                          <p:attrName>style.visibility</p:attrName>
+                                        </p:attrNameLst>
+                                      </p:cBhvr>
+                                      <p:to>
+                                        <p:strVal val="visible"/>
+                                      </p:to>
+                                    </p:set>
+                                    <p:anim calcmode="lin" valueType="num">
+                                      <p:cBhvr additive="base">
+                                        <p:cTn id="21" dur="500" fill="hold"/>
+                                        <p:tgtEl>
+                                          <p:spTgt spid="36">
+                                            <p:txEl>
+                                              <p:pRg st="2" end="2"/>
+                                            </p:txEl>
+                                          </p:spTgt>
+                                        </p:tgtEl>
+                                        <p:attrNameLst>
+                                          <p:attrName>ppt_x</p:attrName>
+                                        </p:attrNameLst>
+                                      </p:cBhvr>
+                                      <p:tavLst>
+                                        <p:tav tm="0">
+                                          <p:val>
+                                            <p:strVal val="0-#ppt_w/2"/>
+                                          </p:val>
+                                        </p:tav>
+                                        <p:tav tm="100000">
+                                          <p:val>
+                                            <p:strVal val="#ppt_x"/>
+                                          </p:val>
+                                        </p:tav>
+                                      </p:tavLst>
+                                    </p:anim>
+                                    <p:anim calcmode="lin" valueType="num">
+                                      <p:cBhvr additive="base">
+                                        <p:cTn id="22" dur="500" fill="hold"/>
+                                        <p:tgtEl>
+                                          <p:spTgt spid="36">
+                                            <p:txEl>
+                                              <p:pRg st="2" end="2"/>
+                                            </p:txEl>
+                                          </p:spTgt>
+                                        </p:tgtEl>
+                                        <p:attrNameLst>
+                                          <p:attrName>ppt_y</p:attrName>
+                                        </p:attrNameLst>
+                                      </p:cBhvr>
+                                      <p:tavLst>
+                                        <p:tav tm="0">
+                                          <p:val>
+                                            <p:strVal val="#ppt_y"/>
+                                          </p:val>
+                                        </p:tav>
+                                        <p:tav tm="100000">
+                                          <p:val>
+                                            <p:strVal val="#ppt_y"/>
+                                          </p:val>
+                                        </p:tav>
+                                      </p:tavLst>
+                                    </p:anim>
+                                  </p:childTnLst>
+                                </p:cTn>
+                              </p:par>
+                            </p:childTnLst>
+                          </p:cTn>
+                        </p:par>
+                      </p:childTnLst>
+                    </p:cTn>
+                  </p:par>
+                  <p:par>
+                    <p:cTn id="23" fill="hold">
+                      <p:stCondLst>
+                        <p:cond delay="indefinite"/>
+                      </p:stCondLst>
+                      <p:childTnLst>
+                        <p:par>
+                          <p:cTn id="24" fill="hold">
+                            <p:stCondLst>
+                              <p:cond delay="0"/>
+                            </p:stCondLst>
+                            <p:childTnLst>
+                              <p:par>
+                                <p:cTn id="25" presetID="10" presetClass="entr" presetSubtype="0" fill="hold" nodeType="clickEffect">
+                                  <p:stCondLst>
+                                    <p:cond delay="0"/>
+                                  </p:stCondLst>
+                                  <p:childTnLst>
+                                    <p:set>
+                                      <p:cBhvr>
+                                        <p:cTn id="26" dur="1" fill="hold">
+                                          <p:stCondLst>
+                                            <p:cond delay="0"/>
+                                          </p:stCondLst>
+                                        </p:cTn>
+                                        <p:tgtEl>
+                                          <p:spTgt spid="23">
+                                            <p:txEl>
+                                              <p:pRg st="0" end="0"/>
+                                            </p:txEl>
+                                          </p:spTgt>
+                                        </p:tgtEl>
+                                        <p:attrNameLst>
+                                          <p:attrName>style.visibility</p:attrName>
+                                        </p:attrNameLst>
+                                      </p:cBhvr>
+                                      <p:to>
+                                        <p:strVal val="visible"/>
+                                      </p:to>
+                                    </p:set>
+                                    <p:animEffect transition="in" filter="fade">
+                                      <p:cBhvr>
+                                        <p:cTn id="27" dur="500"/>
+                                        <p:tgtEl>
+                                          <p:spTgt spid="23">
+                                            <p:txEl>
+                                              <p:pRg st="0" end="0"/>
+                                            </p:txEl>
+                                          </p:spTgt>
+                                        </p:tgtEl>
+                                      </p:cBhvr>
+                                    </p:animEffect>
+                                  </p:childTnLst>
+                                </p:cTn>
+                              </p:par>
+                            </p:childTnLst>
+                          </p:cTn>
+                        </p:par>
+                        <p:par>
+                          <p:cTn id="28" fill="hold">
+                            <p:stCondLst>
+                              <p:cond delay="500"/>
+                            </p:stCondLst>
+                            <p:childTnLst>
+                              <p:par>
+                                <p:cTn id="29" presetID="2" presetClass="entr" presetSubtype="2" fill="hold" nodeType="afterEffect">
+                                  <p:stCondLst>
+                                    <p:cond delay="0"/>
+                                  </p:stCondLst>
+                                  <p:childTnLst>
+                                    <p:set>
+                                      <p:cBhvr>
+                                        <p:cTn id="30" dur="1" fill="hold">
+                                          <p:stCondLst>
+                                            <p:cond delay="0"/>
+                                          </p:stCondLst>
+                                        </p:cTn>
+                                        <p:tgtEl>
+                                          <p:spTgt spid="35">
+                                            <p:txEl>
+                                              <p:pRg st="0" end="0"/>
+                                            </p:txEl>
+                                          </p:spTgt>
+                                        </p:tgtEl>
+                                        <p:attrNameLst>
+                                          <p:attrName>style.visibility</p:attrName>
+                                        </p:attrNameLst>
+                                      </p:cBhvr>
+                                      <p:to>
+                                        <p:strVal val="visible"/>
+                                      </p:to>
+                                    </p:set>
+                                    <p:anim calcmode="lin" valueType="num">
+                                      <p:cBhvr additive="base">
+                                        <p:cTn id="31" dur="500" fill="hold"/>
+                                        <p:tgtEl>
+                                          <p:spTgt spid="35">
+                                            <p:txEl>
+                                              <p:pRg st="0" end="0"/>
+                                            </p:txEl>
+                                          </p:spTgt>
+                                        </p:tgtEl>
+                                        <p:attrNameLst>
+                                          <p:attrName>ppt_x</p:attrName>
+                                        </p:attrNameLst>
+                                      </p:cBhvr>
+                                      <p:tavLst>
+                                        <p:tav tm="0">
+                                          <p:val>
+                                            <p:strVal val="1+#ppt_w/2"/>
+                                          </p:val>
+                                        </p:tav>
+                                        <p:tav tm="100000">
+                                          <p:val>
+                                            <p:strVal val="#ppt_x"/>
+                                          </p:val>
+                                        </p:tav>
+                                      </p:tavLst>
+                                    </p:anim>
+                                    <p:anim calcmode="lin" valueType="num">
+                                      <p:cBhvr additive="base">
+                                        <p:cTn id="32" dur="500" fill="hold"/>
+                                        <p:tgtEl>
+                                          <p:spTgt spid="35">
+                                            <p:txEl>
+                                              <p:pRg st="0" end="0"/>
+                                            </p:txEl>
+                                          </p:spTgt>
+                                        </p:tgtEl>
+                                        <p:attrNameLst>
+                                          <p:attrName>ppt_y</p:attrName>
+                                        </p:attrNameLst>
+                                      </p:cBhvr>
+                                      <p:tavLst>
+                                        <p:tav tm="0">
+                                          <p:val>
+                                            <p:strVal val="#ppt_y"/>
+                                          </p:val>
+                                        </p:tav>
+                                        <p:tav tm="100000">
+                                          <p:val>
+                                            <p:strVal val="#ppt_y"/>
+                                          </p:val>
+                                        </p:tav>
+                                      </p:tavLst>
+                                    </p:anim>
+                                  </p:childTnLst>
+                                </p:cTn>
+                              </p:par>
+                            </p:childTnLst>
+                          </p:cTn>
+                        </p:par>
+                        <p:par>
+                          <p:cTn id="33" fill="hold">
+                            <p:stCondLst>
+                              <p:cond delay="1000"/>
+                            </p:stCondLst>
+                            <p:childTnLst>
+                              <p:par>
+                                <p:cTn id="34" presetID="2" presetClass="entr" presetSubtype="2" fill="hold" nodeType="afterEffect">
+                                  <p:stCondLst>
+                                    <p:cond delay="0"/>
+                                  </p:stCondLst>
+                                  <p:childTnLst>
+                                    <p:set>
+                                      <p:cBhvr>
+                                        <p:cTn id="35" dur="1" fill="hold">
+                                          <p:stCondLst>
+                                            <p:cond delay="0"/>
+                                          </p:stCondLst>
+                                        </p:cTn>
+                                        <p:tgtEl>
+                                          <p:spTgt spid="35">
+                                            <p:txEl>
+                                              <p:pRg st="1" end="1"/>
+                                            </p:txEl>
+                                          </p:spTgt>
+                                        </p:tgtEl>
+                                        <p:attrNameLst>
+                                          <p:attrName>style.visibility</p:attrName>
+                                        </p:attrNameLst>
+                                      </p:cBhvr>
+                                      <p:to>
+                                        <p:strVal val="visible"/>
+                                      </p:to>
+                                    </p:set>
+                                    <p:anim calcmode="lin" valueType="num">
+                                      <p:cBhvr additive="base">
+                                        <p:cTn id="36" dur="500" fill="hold"/>
+                                        <p:tgtEl>
+                                          <p:spTgt spid="35">
+                                            <p:txEl>
+                                              <p:pRg st="1" end="1"/>
+                                            </p:txEl>
+                                          </p:spTgt>
+                                        </p:tgtEl>
+                                        <p:attrNameLst>
+                                          <p:attrName>ppt_x</p:attrName>
+                                        </p:attrNameLst>
+                                      </p:cBhvr>
+                                      <p:tavLst>
+                                        <p:tav tm="0">
+                                          <p:val>
+                                            <p:strVal val="1+#ppt_w/2"/>
+                                          </p:val>
+                                        </p:tav>
+                                        <p:tav tm="100000">
+                                          <p:val>
+                                            <p:strVal val="#ppt_x"/>
+                                          </p:val>
+                                        </p:tav>
+                                      </p:tavLst>
+                                    </p:anim>
+                                    <p:anim calcmode="lin" valueType="num">
+                                      <p:cBhvr additive="base">
+                                        <p:cTn id="37" dur="500" fill="hold"/>
+                                        <p:tgtEl>
+                                          <p:spTgt spid="35">
+                                            <p:txEl>
+                                              <p:pRg st="1" end="1"/>
+                                            </p:txEl>
+                                          </p:spTgt>
+                                        </p:tgtEl>
+                                        <p:attrNameLst>
+                                          <p:attrName>ppt_y</p:attrName>
+                                        </p:attrNameLst>
+                                      </p:cBhvr>
+                                      <p:tavLst>
+                                        <p:tav tm="0">
+                                          <p:val>
+                                            <p:strVal val="#ppt_y"/>
+                                          </p:val>
+                                        </p:tav>
+                                        <p:tav tm="100000">
+                                          <p:val>
+                                            <p:strVal val="#ppt_y"/>
+                                          </p:val>
+                                        </p:tav>
+                                      </p:tavLst>
+                                    </p:anim>
+                                  </p:childTnLst>
+                                </p:cTn>
+                              </p:par>
+                            </p:childTnLst>
+                          </p:cTn>
+                        </p:par>
+                      </p:childTnLst>
+                    </p:cTn>
+                  </p:par>
+                  <p:par>
+                    <p:cTn id="38" fill="hold">
+                      <p:stCondLst>
+                        <p:cond delay="indefinite"/>
+                      </p:stCondLst>
+                      <p:childTnLst>
+                        <p:par>
+                          <p:cTn id="39" fill="hold">
+                            <p:stCondLst>
+                              <p:cond delay="0"/>
+                            </p:stCondLst>
+                            <p:childTnLst>
+                              <p:par>
+                                <p:cTn id="40" presetID="10" presetClass="entr" presetSubtype="0" fill="hold" nodeType="clickEffect">
+                                  <p:stCondLst>
+                                    <p:cond delay="0"/>
+                                  </p:stCondLst>
+                                  <p:childTnLst>
+                                    <p:set>
+                                      <p:cBhvr>
+                                        <p:cTn id="41" dur="1" fill="hold">
+                                          <p:stCondLst>
+                                            <p:cond delay="0"/>
+                                          </p:stCondLst>
+                                        </p:cTn>
+                                        <p:tgtEl>
+                                          <p:spTgt spid="32">
+                                            <p:txEl>
+                                              <p:pRg st="0" end="0"/>
+                                            </p:txEl>
+                                          </p:spTgt>
+                                        </p:tgtEl>
+                                        <p:attrNameLst>
+                                          <p:attrName>style.visibility</p:attrName>
+                                        </p:attrNameLst>
+                                      </p:cBhvr>
+                                      <p:to>
+                                        <p:strVal val="visible"/>
+                                      </p:to>
+                                    </p:set>
+                                    <p:animEffect transition="in" filter="fade">
+                                      <p:cBhvr>
+                                        <p:cTn id="42" dur="500"/>
+                                        <p:tgtEl>
+                                          <p:spTgt spid="32">
+                                            <p:txEl>
+                                              <p:pRg st="0" end="0"/>
+                                            </p:txEl>
+                                          </p:spTgt>
+                                        </p:tgtEl>
+                                      </p:cBhvr>
+                                    </p:animEffect>
+                                  </p:childTnLst>
+                                </p:cTn>
+                              </p:par>
+                            </p:childTnLst>
+                          </p:cTn>
+                        </p:par>
+                        <p:par>
+                          <p:cTn id="43" fill="hold">
+                            <p:stCondLst>
+                              <p:cond delay="500"/>
+                            </p:stCondLst>
+                            <p:childTnLst>
+                              <p:par>
+                                <p:cTn id="44" presetID="2" presetClass="entr" presetSubtype="8" fill="hold" nodeType="afterEffect">
+                                  <p:stCondLst>
+                                    <p:cond delay="0"/>
+                                  </p:stCondLst>
+                                  <p:childTnLst>
+                                    <p:set>
+                                      <p:cBhvr>
+                                        <p:cTn id="45" dur="1" fill="hold">
+                                          <p:stCondLst>
+                                            <p:cond delay="0"/>
+                                          </p:stCondLst>
+                                        </p:cTn>
+                                        <p:tgtEl>
+                                          <p:spTgt spid="34">
+                                            <p:txEl>
+                                              <p:pRg st="0" end="0"/>
+                                            </p:txEl>
+                                          </p:spTgt>
+                                        </p:tgtEl>
+                                        <p:attrNameLst>
+                                          <p:attrName>style.visibility</p:attrName>
+                                        </p:attrNameLst>
+                                      </p:cBhvr>
+                                      <p:to>
+                                        <p:strVal val="visible"/>
+                                      </p:to>
+                                    </p:set>
+                                    <p:anim calcmode="lin" valueType="num">
+                                      <p:cBhvr additive="base">
+                                        <p:cTn id="46" dur="500" fill="hold"/>
+                                        <p:tgtEl>
+                                          <p:spTgt spid="34">
+                                            <p:txEl>
+                                              <p:pRg st="0" end="0"/>
+                                            </p:txEl>
+                                          </p:spTgt>
+                                        </p:tgtEl>
+                                        <p:attrNameLst>
+                                          <p:attrName>ppt_x</p:attrName>
+                                        </p:attrNameLst>
+                                      </p:cBhvr>
+                                      <p:tavLst>
+                                        <p:tav tm="0">
+                                          <p:val>
+                                            <p:strVal val="0-#ppt_w/2"/>
+                                          </p:val>
+                                        </p:tav>
+                                        <p:tav tm="100000">
+                                          <p:val>
+                                            <p:strVal val="#ppt_x"/>
+                                          </p:val>
+                                        </p:tav>
+                                      </p:tavLst>
+                                    </p:anim>
+                                    <p:anim calcmode="lin" valueType="num">
+                                      <p:cBhvr additive="base">
+                                        <p:cTn id="47" dur="500" fill="hold"/>
+                                        <p:tgtEl>
+                                          <p:spTgt spid="34">
+                                            <p:txEl>
+                                              <p:pRg st="0" end="0"/>
+                                            </p:txEl>
+                                          </p:spTgt>
+                                        </p:tgtEl>
+                                        <p:attrNameLst>
+                                          <p:attrName>ppt_y</p:attrName>
+                                        </p:attrNameLst>
+                                      </p:cBhvr>
+                                      <p:tavLst>
+                                        <p:tav tm="0">
+                                          <p:val>
+                                            <p:strVal val="#ppt_y"/>
+                                          </p:val>
+                                        </p:tav>
+                                        <p:tav tm="100000">
+                                          <p:val>
+                                            <p:strVal val="#ppt_y"/>
+                                          </p:val>
+                                        </p:tav>
+                                      </p:tavLst>
+                                    </p:anim>
+                                  </p:childTnLst>
+                                </p:cTn>
+                              </p:par>
+                            </p:childTnLst>
+                          </p:cTn>
+                        </p:par>
+                        <p:par>
+                          <p:cTn id="48" fill="hold">
+                            <p:stCondLst>
+                              <p:cond delay="1000"/>
+                            </p:stCondLst>
+                            <p:childTnLst>
+                              <p:par>
+                                <p:cTn id="49" presetID="2" presetClass="entr" presetSubtype="8" fill="hold" nodeType="afterEffect">
+                                  <p:stCondLst>
+                                    <p:cond delay="0"/>
+                                  </p:stCondLst>
+                                  <p:childTnLst>
+                                    <p:set>
+                                      <p:cBhvr>
+                                        <p:cTn id="50" dur="1" fill="hold">
+                                          <p:stCondLst>
+                                            <p:cond delay="0"/>
+                                          </p:stCondLst>
+                                        </p:cTn>
+                                        <p:tgtEl>
+                                          <p:spTgt spid="34">
+                                            <p:txEl>
+                                              <p:pRg st="1" end="1"/>
+                                            </p:txEl>
+                                          </p:spTgt>
+                                        </p:tgtEl>
+                                        <p:attrNameLst>
+                                          <p:attrName>style.visibility</p:attrName>
+                                        </p:attrNameLst>
+                                      </p:cBhvr>
+                                      <p:to>
+                                        <p:strVal val="visible"/>
+                                      </p:to>
+                                    </p:set>
+                                    <p:anim calcmode="lin" valueType="num">
+                                      <p:cBhvr additive="base">
+                                        <p:cTn id="51" dur="500" fill="hold"/>
+                                        <p:tgtEl>
+                                          <p:spTgt spid="34">
+                                            <p:txEl>
+                                              <p:pRg st="1" end="1"/>
+                                            </p:txEl>
+                                          </p:spTgt>
+                                        </p:tgtEl>
+                                        <p:attrNameLst>
+                                          <p:attrName>ppt_x</p:attrName>
+                                        </p:attrNameLst>
+                                      </p:cBhvr>
+                                      <p:tavLst>
+                                        <p:tav tm="0">
+                                          <p:val>
+                                            <p:strVal val="0-#ppt_w/2"/>
+                                          </p:val>
+                                        </p:tav>
+                                        <p:tav tm="100000">
+                                          <p:val>
+                                            <p:strVal val="#ppt_x"/>
+                                          </p:val>
+                                        </p:tav>
+                                      </p:tavLst>
+                                    </p:anim>
+                                    <p:anim calcmode="lin" valueType="num">
+                                      <p:cBhvr additive="base">
+                                        <p:cTn id="52" dur="500" fill="hold"/>
+                                        <p:tgtEl>
+                                          <p:spTgt spid="34">
+                                            <p:txEl>
+                                              <p:pRg st="1" end="1"/>
+                                            </p:txEl>
+                                          </p:spTgt>
+                                        </p:tgtEl>
+                                        <p:attrNameLst>
+                                          <p:attrName>ppt_y</p:attrName>
+                                        </p:attrNameLst>
+                                      </p:cBhvr>
+                                      <p:tavLst>
+                                        <p:tav tm="0">
+                                          <p:val>
+                                            <p:strVal val="#ppt_y"/>
+                                          </p:val>
+                                        </p:tav>
+                                        <p:tav tm="100000">
+                                          <p:val>
+                                            <p:strVal val="#ppt_y"/>
+                                          </p:val>
+                                        </p:tav>
+                                      </p:tavLst>
+                                    </p:anim>
+                                  </p:childTnLst>
+                                </p:cTn>
+                              </p:par>
+                            </p:childTnLst>
+                          </p:cTn>
+                        </p:par>
+                      </p:childTnLst>
+                    </p:cTn>
+                  </p:par>
+                  <p:par>
+                    <p:cTn id="53" fill="hold">
+                      <p:stCondLst>
+                        <p:cond delay="indefinite"/>
+                      </p:stCondLst>
+                      <p:childTnLst>
+                        <p:par>
+                          <p:cTn id="54" fill="hold">
+                            <p:stCondLst>
+                              <p:cond delay="0"/>
+                            </p:stCondLst>
+                            <p:childTnLst>
+                              <p:par>
+                                <p:cTn id="55" presetID="10" presetClass="entr" presetSubtype="0" fill="hold" nodeType="clickEffect">
+                                  <p:stCondLst>
+                                    <p:cond delay="0"/>
+                                  </p:stCondLst>
+                                  <p:childTnLst>
+                                    <p:set>
+                                      <p:cBhvr>
+                                        <p:cTn id="56" dur="1" fill="hold">
+                                          <p:stCondLst>
+                                            <p:cond delay="0"/>
+                                          </p:stCondLst>
+                                        </p:cTn>
+                                        <p:tgtEl>
+                                          <p:spTgt spid="29">
+                                            <p:txEl>
+                                              <p:pRg st="0" end="0"/>
+                                            </p:txEl>
+                                          </p:spTgt>
+                                        </p:tgtEl>
+                                        <p:attrNameLst>
+                                          <p:attrName>style.visibility</p:attrName>
+                                        </p:attrNameLst>
+                                      </p:cBhvr>
+                                      <p:to>
+                                        <p:strVal val="visible"/>
+                                      </p:to>
+                                    </p:set>
+                                    <p:animEffect transition="in" filter="fade">
+                                      <p:cBhvr>
+                                        <p:cTn id="57" dur="500"/>
+                                        <p:tgtEl>
+                                          <p:spTgt spid="29">
+                                            <p:txEl>
+                                              <p:pRg st="0" end="0"/>
+                                            </p:txEl>
+                                          </p:spTgt>
+                                        </p:tgtEl>
+                                      </p:cBhvr>
+                                    </p:animEffect>
+                                  </p:childTnLst>
+                                </p:cTn>
+                              </p:par>
+                            </p:childTnLst>
+                          </p:cTn>
+                        </p:par>
+                        <p:par>
+                          <p:cTn id="58" fill="hold">
+                            <p:stCondLst>
+                              <p:cond delay="500"/>
+                            </p:stCondLst>
+                            <p:childTnLst>
+                              <p:par>
+                                <p:cTn id="59" presetID="2" presetClass="entr" presetSubtype="2" fill="hold" nodeType="afterEffect">
+                                  <p:stCondLst>
+                                    <p:cond delay="0"/>
+                                  </p:stCondLst>
+                                  <p:childTnLst>
+                                    <p:set>
+                                      <p:cBhvr>
+                                        <p:cTn id="60" dur="1" fill="hold">
+                                          <p:stCondLst>
+                                            <p:cond delay="0"/>
+                                          </p:stCondLst>
+                                        </p:cTn>
+                                        <p:tgtEl>
+                                          <p:spTgt spid="37">
+                                            <p:txEl>
+                                              <p:pRg st="0" end="0"/>
+                                            </p:txEl>
+                                          </p:spTgt>
+                                        </p:tgtEl>
+                                        <p:attrNameLst>
+                                          <p:attrName>style.visibility</p:attrName>
+                                        </p:attrNameLst>
+                                      </p:cBhvr>
+                                      <p:to>
+                                        <p:strVal val="visible"/>
+                                      </p:to>
+                                    </p:set>
+                                    <p:anim calcmode="lin" valueType="num">
+                                      <p:cBhvr additive="base">
+                                        <p:cTn id="61" dur="500" fill="hold"/>
+                                        <p:tgtEl>
+                                          <p:spTgt spid="37">
+                                            <p:txEl>
+                                              <p:pRg st="0" end="0"/>
+                                            </p:txEl>
+                                          </p:spTgt>
+                                        </p:tgtEl>
+                                        <p:attrNameLst>
+                                          <p:attrName>ppt_x</p:attrName>
+                                        </p:attrNameLst>
+                                      </p:cBhvr>
+                                      <p:tavLst>
+                                        <p:tav tm="0">
+                                          <p:val>
+                                            <p:strVal val="1+#ppt_w/2"/>
+                                          </p:val>
+                                        </p:tav>
+                                        <p:tav tm="100000">
+                                          <p:val>
+                                            <p:strVal val="#ppt_x"/>
+                                          </p:val>
+                                        </p:tav>
+                                      </p:tavLst>
+                                    </p:anim>
+                                    <p:anim calcmode="lin" valueType="num">
+                                      <p:cBhvr additive="base">
+                                        <p:cTn id="62" dur="500" fill="hold"/>
+                                        <p:tgtEl>
+                                          <p:spTgt spid="37">
+                                            <p:txEl>
+                                              <p:pRg st="0" end="0"/>
+                                            </p:txEl>
+                                          </p:spTgt>
+                                        </p:tgtEl>
+                                        <p:attrNameLst>
+                                          <p:attrName>ppt_y</p:attrName>
+                                        </p:attrNameLst>
+                                      </p:cBhvr>
+                                      <p:tavLst>
+                                        <p:tav tm="0">
+                                          <p:val>
+                                            <p:strVal val="#ppt_y"/>
+                                          </p:val>
+                                        </p:tav>
+                                        <p:tav tm="100000">
+                                          <p:val>
+                                            <p:strVal val="#ppt_y"/>
+                                          </p:val>
+                                        </p:tav>
+                                      </p:tavLst>
+                                    </p:anim>
+                                  </p:childTnLst>
+                                </p:cTn>
+                              </p:par>
+                            </p:childTnLst>
+                          </p:cTn>
+                        </p:par>
+                        <p:par>
+                          <p:cTn id="63" fill="hold">
+                            <p:stCondLst>
+                              <p:cond delay="1000"/>
+                            </p:stCondLst>
+                            <p:childTnLst>
+                              <p:par>
+                                <p:cTn id="64" presetID="2" presetClass="entr" presetSubtype="2" fill="hold" nodeType="afterEffect">
+                                  <p:stCondLst>
+                                    <p:cond delay="0"/>
+                                  </p:stCondLst>
+                                  <p:childTnLst>
+                                    <p:set>
+                                      <p:cBhvr>
+                                        <p:cTn id="65" dur="1" fill="hold">
+                                          <p:stCondLst>
+                                            <p:cond delay="0"/>
+                                          </p:stCondLst>
+                                        </p:cTn>
+                                        <p:tgtEl>
+                                          <p:spTgt spid="37">
+                                            <p:txEl>
+                                              <p:pRg st="1" end="1"/>
+                                            </p:txEl>
+                                          </p:spTgt>
+                                        </p:tgtEl>
+                                        <p:attrNameLst>
+                                          <p:attrName>style.visibility</p:attrName>
+                                        </p:attrNameLst>
+                                      </p:cBhvr>
+                                      <p:to>
+                                        <p:strVal val="visible"/>
+                                      </p:to>
+                                    </p:set>
+                                    <p:anim calcmode="lin" valueType="num">
+                                      <p:cBhvr additive="base">
+                                        <p:cTn id="66" dur="500" fill="hold"/>
+                                        <p:tgtEl>
+                                          <p:spTgt spid="37">
+                                            <p:txEl>
+                                              <p:pRg st="1" end="1"/>
+                                            </p:txEl>
+                                          </p:spTgt>
+                                        </p:tgtEl>
+                                        <p:attrNameLst>
+                                          <p:attrName>ppt_x</p:attrName>
+                                        </p:attrNameLst>
+                                      </p:cBhvr>
+                                      <p:tavLst>
+                                        <p:tav tm="0">
+                                          <p:val>
+                                            <p:strVal val="1+#ppt_w/2"/>
+                                          </p:val>
+                                        </p:tav>
+                                        <p:tav tm="100000">
+                                          <p:val>
+                                            <p:strVal val="#ppt_x"/>
+                                          </p:val>
+                                        </p:tav>
+                                      </p:tavLst>
+                                    </p:anim>
+                                    <p:anim calcmode="lin" valueType="num">
+                                      <p:cBhvr additive="base">
+                                        <p:cTn id="67" dur="500" fill="hold"/>
+                                        <p:tgtEl>
+                                          <p:spTgt spid="37">
+                                            <p:txEl>
+                                              <p:pRg st="1" end="1"/>
+                                            </p:txEl>
+                                          </p:spTgt>
+                                        </p:tgtEl>
+                                        <p:attrNameLst>
+                                          <p:attrName>ppt_y</p:attrName>
+                                        </p:attrNameLst>
+                                      </p:cBhvr>
+                                      <p:tavLst>
+                                        <p:tav tm="0">
+                                          <p:val>
+                                            <p:strVal val="#ppt_y"/>
+                                          </p:val>
+                                        </p:tav>
+                                        <p:tav tm="100000">
+                                          <p:val>
+                                            <p:strVal val="#ppt_y"/>
+                                          </p:val>
+                                        </p:tav>
+                                      </p:tavLst>
+                                    </p:anim>
+                                  </p:childTnLst>
+                                </p:cTn>
+                              </p:par>
+                            </p:childTnLst>
+                          </p:cTn>
+                        </p:par>
+                      </p:childTnLst>
+                    </p:cTn>
+                  </p:par>
+                </p:childTnLst>
+              </p:cTn>
+              <p:prevCondLst>
+                <p:cond evt="onPrev" delay="0">
+                  <p:tgtEl>
+                    <p:sldTgt/>
+                  </p:tgtEl>
+                </p:cond>
+              </p:prevCondLst>
+              <p:nextCondLst>
+                <p:cond evt="onNext" delay="0">
+                  <p:tgtEl>
+                    <p:sldTgt/>
+                  </p:tgtEl>
+                </p:cond>
+              </p:nextCondLst>
+            </p:seq>
+          </p:childTnLst>
+        </p:cTn>
+      </p:par>
+    </p:tnLst>
+  </p:timing>
 </p:sld>
 </file>
 
@@ -8118,65 +9454,6 @@
                 </a:solidFill>
               </a:rPr>
               <a:t> / 9</a:t>
-            </a:r>
-          </a:p>
-        </p:txBody>
-      </p:sp>
-      <p:sp>
-        <p:nvSpPr>
-          <p:cNvPr id="37" name="Szövegdoboz 36">
-            <a:extLst>
-              <a:ext uri="{FF2B5EF4-FFF2-40B4-BE49-F238E27FC236}">
-                <a16:creationId xmlns:a16="http://schemas.microsoft.com/office/drawing/2014/main" id="{070BD7D4-AAF0-7EA9-570B-C1985766F72B}"/>
-              </a:ext>
-            </a:extLst>
-          </p:cNvPr>
-          <p:cNvSpPr txBox="1"/>
-          <p:nvPr/>
-        </p:nvSpPr>
-        <p:spPr>
-          <a:xfrm>
-            <a:off x="4727512" y="4819718"/>
-            <a:ext cx="3724204" cy="1569660"/>
-          </a:xfrm>
-          <a:prstGeom prst="rect">
-            <a:avLst/>
-          </a:prstGeom>
-          <a:noFill/>
-        </p:spPr>
-        <p:txBody>
-          <a:bodyPr wrap="square" rtlCol="0">
-            <a:spAutoFit/>
-          </a:bodyPr>
-          <a:lstStyle/>
-          <a:p>
-            <a:pPr marL="457200" indent="-180000" algn="ctr">
-              <a:buFont typeface="Arial" panose="020B0604020202020204" pitchFamily="34" charset="0"/>
-              <a:buChar char="•"/>
-            </a:pPr>
-            <a:r>
-              <a:rPr lang="hu-HU" sz="2400" dirty="0">
-                <a:solidFill>
-                  <a:srgbClr val="DCDCCD"/>
-                </a:solidFill>
-                <a:latin typeface="Book Antiqua" panose="02040602050305030304" pitchFamily="18" charset="0"/>
-              </a:rPr>
-              <a:t>Aktivitási grafikon</a:t>
-            </a:r>
-          </a:p>
-          <a:p>
-            <a:pPr marL="457200" indent="-180000" algn="ctr">
-              <a:buFont typeface="Arial" panose="020B0604020202020204" pitchFamily="34" charset="0"/>
-              <a:buChar char="•"/>
-            </a:pPr>
-            <a:r>
-              <a:rPr lang="hu-HU" sz="2400" dirty="0">
-                <a:solidFill>
-                  <a:srgbClr val="DCDCCD"/>
-                </a:solidFill>
-                <a:latin typeface="Book Antiqua" panose="02040602050305030304" pitchFamily="18" charset="0"/>
-              </a:rPr>
-              <a:t>Felhasználók / Posztok / Kommentek moderálása</a:t>
             </a:r>
           </a:p>
         </p:txBody>
@@ -8816,18 +10093,1208 @@
   <p:clrMapOvr>
     <a:masterClrMapping/>
   </p:clrMapOvr>
-  <mc:AlternateContent xmlns:mc="http://schemas.openxmlformats.org/markup-compatibility/2006" xmlns:p159="http://schemas.microsoft.com/office/powerpoint/2015/09/main">
-    <mc:Choice Requires="p159">
+  <mc:AlternateContent xmlns:mc="http://schemas.openxmlformats.org/markup-compatibility/2006">
+    <mc:Choice xmlns:p159="http://schemas.microsoft.com/office/powerpoint/2015/09/main" Requires="p159">
       <p:transition xmlns:p14="http://schemas.microsoft.com/office/powerpoint/2010/main" spd="slow" p14:dur="2000">
         <p159:morph option="byChar"/>
       </p:transition>
     </mc:Choice>
-    <mc:Fallback xmlns="">
+    <mc:Fallback>
       <p:transition spd="slow">
         <p:fade/>
       </p:transition>
     </mc:Fallback>
   </mc:AlternateContent>
+  <p:timing>
+    <p:tnLst>
+      <p:par>
+        <p:cTn id="1" dur="indefinite" restart="never" nodeType="tmRoot">
+          <p:childTnLst>
+            <p:seq concurrent="1" nextAc="seek">
+              <p:cTn id="2" dur="indefinite" nodeType="mainSeq">
+                <p:childTnLst>
+                  <p:par>
+                    <p:cTn id="3" fill="hold">
+                      <p:stCondLst>
+                        <p:cond delay="indefinite"/>
+                      </p:stCondLst>
+                      <p:childTnLst>
+                        <p:par>
+                          <p:cTn id="4" fill="hold">
+                            <p:stCondLst>
+                              <p:cond delay="0"/>
+                            </p:stCondLst>
+                            <p:childTnLst>
+                              <p:par>
+                                <p:cTn id="5" presetID="10" presetClass="entr" presetSubtype="0" fill="hold" nodeType="clickEffect">
+                                  <p:stCondLst>
+                                    <p:cond delay="0"/>
+                                  </p:stCondLst>
+                                  <p:childTnLst>
+                                    <p:set>
+                                      <p:cBhvr>
+                                        <p:cTn id="6" dur="1" fill="hold">
+                                          <p:stCondLst>
+                                            <p:cond delay="0"/>
+                                          </p:stCondLst>
+                                        </p:cTn>
+                                        <p:tgtEl>
+                                          <p:spTgt spid="18">
+                                            <p:txEl>
+                                              <p:pRg st="0" end="0"/>
+                                            </p:txEl>
+                                          </p:spTgt>
+                                        </p:tgtEl>
+                                        <p:attrNameLst>
+                                          <p:attrName>style.visibility</p:attrName>
+                                        </p:attrNameLst>
+                                      </p:cBhvr>
+                                      <p:to>
+                                        <p:strVal val="visible"/>
+                                      </p:to>
+                                    </p:set>
+                                    <p:animEffect transition="in" filter="fade">
+                                      <p:cBhvr>
+                                        <p:cTn id="7" dur="500"/>
+                                        <p:tgtEl>
+                                          <p:spTgt spid="18">
+                                            <p:txEl>
+                                              <p:pRg st="0" end="0"/>
+                                            </p:txEl>
+                                          </p:spTgt>
+                                        </p:tgtEl>
+                                      </p:cBhvr>
+                                    </p:animEffect>
+                                  </p:childTnLst>
+                                </p:cTn>
+                              </p:par>
+                            </p:childTnLst>
+                          </p:cTn>
+                        </p:par>
+                        <p:par>
+                          <p:cTn id="8" fill="hold">
+                            <p:stCondLst>
+                              <p:cond delay="500"/>
+                            </p:stCondLst>
+                            <p:childTnLst>
+                              <p:par>
+                                <p:cTn id="9" presetID="2" presetClass="entr" presetSubtype="4" fill="hold" nodeType="afterEffect">
+                                  <p:stCondLst>
+                                    <p:cond delay="0"/>
+                                  </p:stCondLst>
+                                  <p:childTnLst>
+                                    <p:set>
+                                      <p:cBhvr>
+                                        <p:cTn id="10" dur="1" fill="hold">
+                                          <p:stCondLst>
+                                            <p:cond delay="0"/>
+                                          </p:stCondLst>
+                                        </p:cTn>
+                                        <p:tgtEl>
+                                          <p:spTgt spid="39">
+                                            <p:txEl>
+                                              <p:pRg st="0" end="0"/>
+                                            </p:txEl>
+                                          </p:spTgt>
+                                        </p:tgtEl>
+                                        <p:attrNameLst>
+                                          <p:attrName>style.visibility</p:attrName>
+                                        </p:attrNameLst>
+                                      </p:cBhvr>
+                                      <p:to>
+                                        <p:strVal val="visible"/>
+                                      </p:to>
+                                    </p:set>
+                                    <p:anim calcmode="lin" valueType="num">
+                                      <p:cBhvr additive="base">
+                                        <p:cTn id="11" dur="500" fill="hold"/>
+                                        <p:tgtEl>
+                                          <p:spTgt spid="39">
+                                            <p:txEl>
+                                              <p:pRg st="0" end="0"/>
+                                            </p:txEl>
+                                          </p:spTgt>
+                                        </p:tgtEl>
+                                        <p:attrNameLst>
+                                          <p:attrName>ppt_x</p:attrName>
+                                        </p:attrNameLst>
+                                      </p:cBhvr>
+                                      <p:tavLst>
+                                        <p:tav tm="0">
+                                          <p:val>
+                                            <p:strVal val="#ppt_x"/>
+                                          </p:val>
+                                        </p:tav>
+                                        <p:tav tm="100000">
+                                          <p:val>
+                                            <p:strVal val="#ppt_x"/>
+                                          </p:val>
+                                        </p:tav>
+                                      </p:tavLst>
+                                    </p:anim>
+                                    <p:anim calcmode="lin" valueType="num">
+                                      <p:cBhvr additive="base">
+                                        <p:cTn id="12" dur="500" fill="hold"/>
+                                        <p:tgtEl>
+                                          <p:spTgt spid="39">
+                                            <p:txEl>
+                                              <p:pRg st="0" end="0"/>
+                                            </p:txEl>
+                                          </p:spTgt>
+                                        </p:tgtEl>
+                                        <p:attrNameLst>
+                                          <p:attrName>ppt_y</p:attrName>
+                                        </p:attrNameLst>
+                                      </p:cBhvr>
+                                      <p:tavLst>
+                                        <p:tav tm="0">
+                                          <p:val>
+                                            <p:strVal val="1+#ppt_h/2"/>
+                                          </p:val>
+                                        </p:tav>
+                                        <p:tav tm="100000">
+                                          <p:val>
+                                            <p:strVal val="#ppt_y"/>
+                                          </p:val>
+                                        </p:tav>
+                                      </p:tavLst>
+                                    </p:anim>
+                                  </p:childTnLst>
+                                </p:cTn>
+                              </p:par>
+                              <p:par>
+                                <p:cTn id="13" presetID="2" presetClass="entr" presetSubtype="4" fill="hold" nodeType="withEffect">
+                                  <p:stCondLst>
+                                    <p:cond delay="0"/>
+                                  </p:stCondLst>
+                                  <p:childTnLst>
+                                    <p:set>
+                                      <p:cBhvr>
+                                        <p:cTn id="14" dur="1" fill="hold">
+                                          <p:stCondLst>
+                                            <p:cond delay="0"/>
+                                          </p:stCondLst>
+                                        </p:cTn>
+                                        <p:tgtEl>
+                                          <p:spTgt spid="39">
+                                            <p:txEl>
+                                              <p:pRg st="1" end="1"/>
+                                            </p:txEl>
+                                          </p:spTgt>
+                                        </p:tgtEl>
+                                        <p:attrNameLst>
+                                          <p:attrName>style.visibility</p:attrName>
+                                        </p:attrNameLst>
+                                      </p:cBhvr>
+                                      <p:to>
+                                        <p:strVal val="visible"/>
+                                      </p:to>
+                                    </p:set>
+                                    <p:anim calcmode="lin" valueType="num">
+                                      <p:cBhvr additive="base">
+                                        <p:cTn id="15" dur="500" fill="hold"/>
+                                        <p:tgtEl>
+                                          <p:spTgt spid="39">
+                                            <p:txEl>
+                                              <p:pRg st="1" end="1"/>
+                                            </p:txEl>
+                                          </p:spTgt>
+                                        </p:tgtEl>
+                                        <p:attrNameLst>
+                                          <p:attrName>ppt_x</p:attrName>
+                                        </p:attrNameLst>
+                                      </p:cBhvr>
+                                      <p:tavLst>
+                                        <p:tav tm="0">
+                                          <p:val>
+                                            <p:strVal val="#ppt_x"/>
+                                          </p:val>
+                                        </p:tav>
+                                        <p:tav tm="100000">
+                                          <p:val>
+                                            <p:strVal val="#ppt_x"/>
+                                          </p:val>
+                                        </p:tav>
+                                      </p:tavLst>
+                                    </p:anim>
+                                    <p:anim calcmode="lin" valueType="num">
+                                      <p:cBhvr additive="base">
+                                        <p:cTn id="16" dur="500" fill="hold"/>
+                                        <p:tgtEl>
+                                          <p:spTgt spid="39">
+                                            <p:txEl>
+                                              <p:pRg st="1" end="1"/>
+                                            </p:txEl>
+                                          </p:spTgt>
+                                        </p:tgtEl>
+                                        <p:attrNameLst>
+                                          <p:attrName>ppt_y</p:attrName>
+                                        </p:attrNameLst>
+                                      </p:cBhvr>
+                                      <p:tavLst>
+                                        <p:tav tm="0">
+                                          <p:val>
+                                            <p:strVal val="1+#ppt_h/2"/>
+                                          </p:val>
+                                        </p:tav>
+                                        <p:tav tm="100000">
+                                          <p:val>
+                                            <p:strVal val="#ppt_y"/>
+                                          </p:val>
+                                        </p:tav>
+                                      </p:tavLst>
+                                    </p:anim>
+                                  </p:childTnLst>
+                                </p:cTn>
+                              </p:par>
+                              <p:par>
+                                <p:cTn id="17" presetID="2" presetClass="entr" presetSubtype="4" fill="hold" nodeType="withEffect">
+                                  <p:stCondLst>
+                                    <p:cond delay="0"/>
+                                  </p:stCondLst>
+                                  <p:childTnLst>
+                                    <p:set>
+                                      <p:cBhvr>
+                                        <p:cTn id="18" dur="1" fill="hold">
+                                          <p:stCondLst>
+                                            <p:cond delay="0"/>
+                                          </p:stCondLst>
+                                        </p:cTn>
+                                        <p:tgtEl>
+                                          <p:spTgt spid="39">
+                                            <p:txEl>
+                                              <p:pRg st="2" end="2"/>
+                                            </p:txEl>
+                                          </p:spTgt>
+                                        </p:tgtEl>
+                                        <p:attrNameLst>
+                                          <p:attrName>style.visibility</p:attrName>
+                                        </p:attrNameLst>
+                                      </p:cBhvr>
+                                      <p:to>
+                                        <p:strVal val="visible"/>
+                                      </p:to>
+                                    </p:set>
+                                    <p:anim calcmode="lin" valueType="num">
+                                      <p:cBhvr additive="base">
+                                        <p:cTn id="19" dur="500" fill="hold"/>
+                                        <p:tgtEl>
+                                          <p:spTgt spid="39">
+                                            <p:txEl>
+                                              <p:pRg st="2" end="2"/>
+                                            </p:txEl>
+                                          </p:spTgt>
+                                        </p:tgtEl>
+                                        <p:attrNameLst>
+                                          <p:attrName>ppt_x</p:attrName>
+                                        </p:attrNameLst>
+                                      </p:cBhvr>
+                                      <p:tavLst>
+                                        <p:tav tm="0">
+                                          <p:val>
+                                            <p:strVal val="#ppt_x"/>
+                                          </p:val>
+                                        </p:tav>
+                                        <p:tav tm="100000">
+                                          <p:val>
+                                            <p:strVal val="#ppt_x"/>
+                                          </p:val>
+                                        </p:tav>
+                                      </p:tavLst>
+                                    </p:anim>
+                                    <p:anim calcmode="lin" valueType="num">
+                                      <p:cBhvr additive="base">
+                                        <p:cTn id="20" dur="500" fill="hold"/>
+                                        <p:tgtEl>
+                                          <p:spTgt spid="39">
+                                            <p:txEl>
+                                              <p:pRg st="2" end="2"/>
+                                            </p:txEl>
+                                          </p:spTgt>
+                                        </p:tgtEl>
+                                        <p:attrNameLst>
+                                          <p:attrName>ppt_y</p:attrName>
+                                        </p:attrNameLst>
+                                      </p:cBhvr>
+                                      <p:tavLst>
+                                        <p:tav tm="0">
+                                          <p:val>
+                                            <p:strVal val="1+#ppt_h/2"/>
+                                          </p:val>
+                                        </p:tav>
+                                        <p:tav tm="100000">
+                                          <p:val>
+                                            <p:strVal val="#ppt_y"/>
+                                          </p:val>
+                                        </p:tav>
+                                      </p:tavLst>
+                                    </p:anim>
+                                  </p:childTnLst>
+                                </p:cTn>
+                              </p:par>
+                              <p:par>
+                                <p:cTn id="21" presetID="2" presetClass="entr" presetSubtype="4" fill="hold" nodeType="withEffect">
+                                  <p:stCondLst>
+                                    <p:cond delay="0"/>
+                                  </p:stCondLst>
+                                  <p:childTnLst>
+                                    <p:set>
+                                      <p:cBhvr>
+                                        <p:cTn id="22" dur="1" fill="hold">
+                                          <p:stCondLst>
+                                            <p:cond delay="0"/>
+                                          </p:stCondLst>
+                                        </p:cTn>
+                                        <p:tgtEl>
+                                          <p:spTgt spid="39">
+                                            <p:txEl>
+                                              <p:pRg st="3" end="3"/>
+                                            </p:txEl>
+                                          </p:spTgt>
+                                        </p:tgtEl>
+                                        <p:attrNameLst>
+                                          <p:attrName>style.visibility</p:attrName>
+                                        </p:attrNameLst>
+                                      </p:cBhvr>
+                                      <p:to>
+                                        <p:strVal val="visible"/>
+                                      </p:to>
+                                    </p:set>
+                                    <p:anim calcmode="lin" valueType="num">
+                                      <p:cBhvr additive="base">
+                                        <p:cTn id="23" dur="500" fill="hold"/>
+                                        <p:tgtEl>
+                                          <p:spTgt spid="39">
+                                            <p:txEl>
+                                              <p:pRg st="3" end="3"/>
+                                            </p:txEl>
+                                          </p:spTgt>
+                                        </p:tgtEl>
+                                        <p:attrNameLst>
+                                          <p:attrName>ppt_x</p:attrName>
+                                        </p:attrNameLst>
+                                      </p:cBhvr>
+                                      <p:tavLst>
+                                        <p:tav tm="0">
+                                          <p:val>
+                                            <p:strVal val="#ppt_x"/>
+                                          </p:val>
+                                        </p:tav>
+                                        <p:tav tm="100000">
+                                          <p:val>
+                                            <p:strVal val="#ppt_x"/>
+                                          </p:val>
+                                        </p:tav>
+                                      </p:tavLst>
+                                    </p:anim>
+                                    <p:anim calcmode="lin" valueType="num">
+                                      <p:cBhvr additive="base">
+                                        <p:cTn id="24" dur="500" fill="hold"/>
+                                        <p:tgtEl>
+                                          <p:spTgt spid="39">
+                                            <p:txEl>
+                                              <p:pRg st="3" end="3"/>
+                                            </p:txEl>
+                                          </p:spTgt>
+                                        </p:tgtEl>
+                                        <p:attrNameLst>
+                                          <p:attrName>ppt_y</p:attrName>
+                                        </p:attrNameLst>
+                                      </p:cBhvr>
+                                      <p:tavLst>
+                                        <p:tav tm="0">
+                                          <p:val>
+                                            <p:strVal val="1+#ppt_h/2"/>
+                                          </p:val>
+                                        </p:tav>
+                                        <p:tav tm="100000">
+                                          <p:val>
+                                            <p:strVal val="#ppt_y"/>
+                                          </p:val>
+                                        </p:tav>
+                                      </p:tavLst>
+                                    </p:anim>
+                                  </p:childTnLst>
+                                </p:cTn>
+                              </p:par>
+                              <p:par>
+                                <p:cTn id="25" presetID="2" presetClass="entr" presetSubtype="4" fill="hold" nodeType="withEffect">
+                                  <p:stCondLst>
+                                    <p:cond delay="0"/>
+                                  </p:stCondLst>
+                                  <p:childTnLst>
+                                    <p:set>
+                                      <p:cBhvr>
+                                        <p:cTn id="26" dur="1" fill="hold">
+                                          <p:stCondLst>
+                                            <p:cond delay="0"/>
+                                          </p:stCondLst>
+                                        </p:cTn>
+                                        <p:tgtEl>
+                                          <p:spTgt spid="39">
+                                            <p:txEl>
+                                              <p:pRg st="4" end="4"/>
+                                            </p:txEl>
+                                          </p:spTgt>
+                                        </p:tgtEl>
+                                        <p:attrNameLst>
+                                          <p:attrName>style.visibility</p:attrName>
+                                        </p:attrNameLst>
+                                      </p:cBhvr>
+                                      <p:to>
+                                        <p:strVal val="visible"/>
+                                      </p:to>
+                                    </p:set>
+                                    <p:anim calcmode="lin" valueType="num">
+                                      <p:cBhvr additive="base">
+                                        <p:cTn id="27" dur="500" fill="hold"/>
+                                        <p:tgtEl>
+                                          <p:spTgt spid="39">
+                                            <p:txEl>
+                                              <p:pRg st="4" end="4"/>
+                                            </p:txEl>
+                                          </p:spTgt>
+                                        </p:tgtEl>
+                                        <p:attrNameLst>
+                                          <p:attrName>ppt_x</p:attrName>
+                                        </p:attrNameLst>
+                                      </p:cBhvr>
+                                      <p:tavLst>
+                                        <p:tav tm="0">
+                                          <p:val>
+                                            <p:strVal val="#ppt_x"/>
+                                          </p:val>
+                                        </p:tav>
+                                        <p:tav tm="100000">
+                                          <p:val>
+                                            <p:strVal val="#ppt_x"/>
+                                          </p:val>
+                                        </p:tav>
+                                      </p:tavLst>
+                                    </p:anim>
+                                    <p:anim calcmode="lin" valueType="num">
+                                      <p:cBhvr additive="base">
+                                        <p:cTn id="28" dur="500" fill="hold"/>
+                                        <p:tgtEl>
+                                          <p:spTgt spid="39">
+                                            <p:txEl>
+                                              <p:pRg st="4" end="4"/>
+                                            </p:txEl>
+                                          </p:spTgt>
+                                        </p:tgtEl>
+                                        <p:attrNameLst>
+                                          <p:attrName>ppt_y</p:attrName>
+                                        </p:attrNameLst>
+                                      </p:cBhvr>
+                                      <p:tavLst>
+                                        <p:tav tm="0">
+                                          <p:val>
+                                            <p:strVal val="1+#ppt_h/2"/>
+                                          </p:val>
+                                        </p:tav>
+                                        <p:tav tm="100000">
+                                          <p:val>
+                                            <p:strVal val="#ppt_y"/>
+                                          </p:val>
+                                        </p:tav>
+                                      </p:tavLst>
+                                    </p:anim>
+                                  </p:childTnLst>
+                                </p:cTn>
+                              </p:par>
+                              <p:par>
+                                <p:cTn id="29" presetID="2" presetClass="entr" presetSubtype="4" fill="hold" nodeType="withEffect">
+                                  <p:stCondLst>
+                                    <p:cond delay="0"/>
+                                  </p:stCondLst>
+                                  <p:childTnLst>
+                                    <p:set>
+                                      <p:cBhvr>
+                                        <p:cTn id="30" dur="1" fill="hold">
+                                          <p:stCondLst>
+                                            <p:cond delay="0"/>
+                                          </p:stCondLst>
+                                        </p:cTn>
+                                        <p:tgtEl>
+                                          <p:spTgt spid="39">
+                                            <p:txEl>
+                                              <p:pRg st="5" end="5"/>
+                                            </p:txEl>
+                                          </p:spTgt>
+                                        </p:tgtEl>
+                                        <p:attrNameLst>
+                                          <p:attrName>style.visibility</p:attrName>
+                                        </p:attrNameLst>
+                                      </p:cBhvr>
+                                      <p:to>
+                                        <p:strVal val="visible"/>
+                                      </p:to>
+                                    </p:set>
+                                    <p:anim calcmode="lin" valueType="num">
+                                      <p:cBhvr additive="base">
+                                        <p:cTn id="31" dur="500" fill="hold"/>
+                                        <p:tgtEl>
+                                          <p:spTgt spid="39">
+                                            <p:txEl>
+                                              <p:pRg st="5" end="5"/>
+                                            </p:txEl>
+                                          </p:spTgt>
+                                        </p:tgtEl>
+                                        <p:attrNameLst>
+                                          <p:attrName>ppt_x</p:attrName>
+                                        </p:attrNameLst>
+                                      </p:cBhvr>
+                                      <p:tavLst>
+                                        <p:tav tm="0">
+                                          <p:val>
+                                            <p:strVal val="#ppt_x"/>
+                                          </p:val>
+                                        </p:tav>
+                                        <p:tav tm="100000">
+                                          <p:val>
+                                            <p:strVal val="#ppt_x"/>
+                                          </p:val>
+                                        </p:tav>
+                                      </p:tavLst>
+                                    </p:anim>
+                                    <p:anim calcmode="lin" valueType="num">
+                                      <p:cBhvr additive="base">
+                                        <p:cTn id="32" dur="500" fill="hold"/>
+                                        <p:tgtEl>
+                                          <p:spTgt spid="39">
+                                            <p:txEl>
+                                              <p:pRg st="5" end="5"/>
+                                            </p:txEl>
+                                          </p:spTgt>
+                                        </p:tgtEl>
+                                        <p:attrNameLst>
+                                          <p:attrName>ppt_y</p:attrName>
+                                        </p:attrNameLst>
+                                      </p:cBhvr>
+                                      <p:tavLst>
+                                        <p:tav tm="0">
+                                          <p:val>
+                                            <p:strVal val="1+#ppt_h/2"/>
+                                          </p:val>
+                                        </p:tav>
+                                        <p:tav tm="100000">
+                                          <p:val>
+                                            <p:strVal val="#ppt_y"/>
+                                          </p:val>
+                                        </p:tav>
+                                      </p:tavLst>
+                                    </p:anim>
+                                  </p:childTnLst>
+                                </p:cTn>
+                              </p:par>
+                              <p:par>
+                                <p:cTn id="33" presetID="2" presetClass="entr" presetSubtype="4" fill="hold" nodeType="withEffect">
+                                  <p:stCondLst>
+                                    <p:cond delay="0"/>
+                                  </p:stCondLst>
+                                  <p:childTnLst>
+                                    <p:set>
+                                      <p:cBhvr>
+                                        <p:cTn id="34" dur="1" fill="hold">
+                                          <p:stCondLst>
+                                            <p:cond delay="0"/>
+                                          </p:stCondLst>
+                                        </p:cTn>
+                                        <p:tgtEl>
+                                          <p:spTgt spid="39">
+                                            <p:txEl>
+                                              <p:pRg st="6" end="6"/>
+                                            </p:txEl>
+                                          </p:spTgt>
+                                        </p:tgtEl>
+                                        <p:attrNameLst>
+                                          <p:attrName>style.visibility</p:attrName>
+                                        </p:attrNameLst>
+                                      </p:cBhvr>
+                                      <p:to>
+                                        <p:strVal val="visible"/>
+                                      </p:to>
+                                    </p:set>
+                                    <p:anim calcmode="lin" valueType="num">
+                                      <p:cBhvr additive="base">
+                                        <p:cTn id="35" dur="500" fill="hold"/>
+                                        <p:tgtEl>
+                                          <p:spTgt spid="39">
+                                            <p:txEl>
+                                              <p:pRg st="6" end="6"/>
+                                            </p:txEl>
+                                          </p:spTgt>
+                                        </p:tgtEl>
+                                        <p:attrNameLst>
+                                          <p:attrName>ppt_x</p:attrName>
+                                        </p:attrNameLst>
+                                      </p:cBhvr>
+                                      <p:tavLst>
+                                        <p:tav tm="0">
+                                          <p:val>
+                                            <p:strVal val="#ppt_x"/>
+                                          </p:val>
+                                        </p:tav>
+                                        <p:tav tm="100000">
+                                          <p:val>
+                                            <p:strVal val="#ppt_x"/>
+                                          </p:val>
+                                        </p:tav>
+                                      </p:tavLst>
+                                    </p:anim>
+                                    <p:anim calcmode="lin" valueType="num">
+                                      <p:cBhvr additive="base">
+                                        <p:cTn id="36" dur="500" fill="hold"/>
+                                        <p:tgtEl>
+                                          <p:spTgt spid="39">
+                                            <p:txEl>
+                                              <p:pRg st="6" end="6"/>
+                                            </p:txEl>
+                                          </p:spTgt>
+                                        </p:tgtEl>
+                                        <p:attrNameLst>
+                                          <p:attrName>ppt_y</p:attrName>
+                                        </p:attrNameLst>
+                                      </p:cBhvr>
+                                      <p:tavLst>
+                                        <p:tav tm="0">
+                                          <p:val>
+                                            <p:strVal val="1+#ppt_h/2"/>
+                                          </p:val>
+                                        </p:tav>
+                                        <p:tav tm="100000">
+                                          <p:val>
+                                            <p:strVal val="#ppt_y"/>
+                                          </p:val>
+                                        </p:tav>
+                                      </p:tavLst>
+                                    </p:anim>
+                                  </p:childTnLst>
+                                </p:cTn>
+                              </p:par>
+                            </p:childTnLst>
+                          </p:cTn>
+                        </p:par>
+                      </p:childTnLst>
+                    </p:cTn>
+                  </p:par>
+                  <p:par>
+                    <p:cTn id="37" fill="hold">
+                      <p:stCondLst>
+                        <p:cond delay="indefinite"/>
+                      </p:stCondLst>
+                      <p:childTnLst>
+                        <p:par>
+                          <p:cTn id="38" fill="hold">
+                            <p:stCondLst>
+                              <p:cond delay="0"/>
+                            </p:stCondLst>
+                            <p:childTnLst>
+                              <p:par>
+                                <p:cTn id="39" presetID="10" presetClass="entr" presetSubtype="0" fill="hold" nodeType="clickEffect">
+                                  <p:stCondLst>
+                                    <p:cond delay="0"/>
+                                  </p:stCondLst>
+                                  <p:childTnLst>
+                                    <p:set>
+                                      <p:cBhvr>
+                                        <p:cTn id="40" dur="1" fill="hold">
+                                          <p:stCondLst>
+                                            <p:cond delay="0"/>
+                                          </p:stCondLst>
+                                        </p:cTn>
+                                        <p:tgtEl>
+                                          <p:spTgt spid="19">
+                                            <p:txEl>
+                                              <p:pRg st="0" end="0"/>
+                                            </p:txEl>
+                                          </p:spTgt>
+                                        </p:tgtEl>
+                                        <p:attrNameLst>
+                                          <p:attrName>style.visibility</p:attrName>
+                                        </p:attrNameLst>
+                                      </p:cBhvr>
+                                      <p:to>
+                                        <p:strVal val="visible"/>
+                                      </p:to>
+                                    </p:set>
+                                    <p:animEffect transition="in" filter="fade">
+                                      <p:cBhvr>
+                                        <p:cTn id="41" dur="500"/>
+                                        <p:tgtEl>
+                                          <p:spTgt spid="19">
+                                            <p:txEl>
+                                              <p:pRg st="0" end="0"/>
+                                            </p:txEl>
+                                          </p:spTgt>
+                                        </p:tgtEl>
+                                      </p:cBhvr>
+                                    </p:animEffect>
+                                  </p:childTnLst>
+                                </p:cTn>
+                              </p:par>
+                            </p:childTnLst>
+                          </p:cTn>
+                        </p:par>
+                        <p:par>
+                          <p:cTn id="42" fill="hold">
+                            <p:stCondLst>
+                              <p:cond delay="500"/>
+                            </p:stCondLst>
+                            <p:childTnLst>
+                              <p:par>
+                                <p:cTn id="43" presetID="2" presetClass="entr" presetSubtype="4" fill="hold" nodeType="afterEffect">
+                                  <p:stCondLst>
+                                    <p:cond delay="0"/>
+                                  </p:stCondLst>
+                                  <p:childTnLst>
+                                    <p:set>
+                                      <p:cBhvr>
+                                        <p:cTn id="44" dur="1" fill="hold">
+                                          <p:stCondLst>
+                                            <p:cond delay="0"/>
+                                          </p:stCondLst>
+                                        </p:cTn>
+                                        <p:tgtEl>
+                                          <p:spTgt spid="40">
+                                            <p:txEl>
+                                              <p:pRg st="0" end="0"/>
+                                            </p:txEl>
+                                          </p:spTgt>
+                                        </p:tgtEl>
+                                        <p:attrNameLst>
+                                          <p:attrName>style.visibility</p:attrName>
+                                        </p:attrNameLst>
+                                      </p:cBhvr>
+                                      <p:to>
+                                        <p:strVal val="visible"/>
+                                      </p:to>
+                                    </p:set>
+                                    <p:anim calcmode="lin" valueType="num">
+                                      <p:cBhvr additive="base">
+                                        <p:cTn id="45" dur="500" fill="hold"/>
+                                        <p:tgtEl>
+                                          <p:spTgt spid="40">
+                                            <p:txEl>
+                                              <p:pRg st="0" end="0"/>
+                                            </p:txEl>
+                                          </p:spTgt>
+                                        </p:tgtEl>
+                                        <p:attrNameLst>
+                                          <p:attrName>ppt_x</p:attrName>
+                                        </p:attrNameLst>
+                                      </p:cBhvr>
+                                      <p:tavLst>
+                                        <p:tav tm="0">
+                                          <p:val>
+                                            <p:strVal val="#ppt_x"/>
+                                          </p:val>
+                                        </p:tav>
+                                        <p:tav tm="100000">
+                                          <p:val>
+                                            <p:strVal val="#ppt_x"/>
+                                          </p:val>
+                                        </p:tav>
+                                      </p:tavLst>
+                                    </p:anim>
+                                    <p:anim calcmode="lin" valueType="num">
+                                      <p:cBhvr additive="base">
+                                        <p:cTn id="46" dur="500" fill="hold"/>
+                                        <p:tgtEl>
+                                          <p:spTgt spid="40">
+                                            <p:txEl>
+                                              <p:pRg st="0" end="0"/>
+                                            </p:txEl>
+                                          </p:spTgt>
+                                        </p:tgtEl>
+                                        <p:attrNameLst>
+                                          <p:attrName>ppt_y</p:attrName>
+                                        </p:attrNameLst>
+                                      </p:cBhvr>
+                                      <p:tavLst>
+                                        <p:tav tm="0">
+                                          <p:val>
+                                            <p:strVal val="1+#ppt_h/2"/>
+                                          </p:val>
+                                        </p:tav>
+                                        <p:tav tm="100000">
+                                          <p:val>
+                                            <p:strVal val="#ppt_y"/>
+                                          </p:val>
+                                        </p:tav>
+                                      </p:tavLst>
+                                    </p:anim>
+                                  </p:childTnLst>
+                                </p:cTn>
+                              </p:par>
+                              <p:par>
+                                <p:cTn id="47" presetID="2" presetClass="entr" presetSubtype="4" fill="hold" nodeType="withEffect">
+                                  <p:stCondLst>
+                                    <p:cond delay="0"/>
+                                  </p:stCondLst>
+                                  <p:childTnLst>
+                                    <p:set>
+                                      <p:cBhvr>
+                                        <p:cTn id="48" dur="1" fill="hold">
+                                          <p:stCondLst>
+                                            <p:cond delay="0"/>
+                                          </p:stCondLst>
+                                        </p:cTn>
+                                        <p:tgtEl>
+                                          <p:spTgt spid="40">
+                                            <p:txEl>
+                                              <p:pRg st="1" end="1"/>
+                                            </p:txEl>
+                                          </p:spTgt>
+                                        </p:tgtEl>
+                                        <p:attrNameLst>
+                                          <p:attrName>style.visibility</p:attrName>
+                                        </p:attrNameLst>
+                                      </p:cBhvr>
+                                      <p:to>
+                                        <p:strVal val="visible"/>
+                                      </p:to>
+                                    </p:set>
+                                    <p:anim calcmode="lin" valueType="num">
+                                      <p:cBhvr additive="base">
+                                        <p:cTn id="49" dur="500" fill="hold"/>
+                                        <p:tgtEl>
+                                          <p:spTgt spid="40">
+                                            <p:txEl>
+                                              <p:pRg st="1" end="1"/>
+                                            </p:txEl>
+                                          </p:spTgt>
+                                        </p:tgtEl>
+                                        <p:attrNameLst>
+                                          <p:attrName>ppt_x</p:attrName>
+                                        </p:attrNameLst>
+                                      </p:cBhvr>
+                                      <p:tavLst>
+                                        <p:tav tm="0">
+                                          <p:val>
+                                            <p:strVal val="#ppt_x"/>
+                                          </p:val>
+                                        </p:tav>
+                                        <p:tav tm="100000">
+                                          <p:val>
+                                            <p:strVal val="#ppt_x"/>
+                                          </p:val>
+                                        </p:tav>
+                                      </p:tavLst>
+                                    </p:anim>
+                                    <p:anim calcmode="lin" valueType="num">
+                                      <p:cBhvr additive="base">
+                                        <p:cTn id="50" dur="500" fill="hold"/>
+                                        <p:tgtEl>
+                                          <p:spTgt spid="40">
+                                            <p:txEl>
+                                              <p:pRg st="1" end="1"/>
+                                            </p:txEl>
+                                          </p:spTgt>
+                                        </p:tgtEl>
+                                        <p:attrNameLst>
+                                          <p:attrName>ppt_y</p:attrName>
+                                        </p:attrNameLst>
+                                      </p:cBhvr>
+                                      <p:tavLst>
+                                        <p:tav tm="0">
+                                          <p:val>
+                                            <p:strVal val="1+#ppt_h/2"/>
+                                          </p:val>
+                                        </p:tav>
+                                        <p:tav tm="100000">
+                                          <p:val>
+                                            <p:strVal val="#ppt_y"/>
+                                          </p:val>
+                                        </p:tav>
+                                      </p:tavLst>
+                                    </p:anim>
+                                  </p:childTnLst>
+                                </p:cTn>
+                              </p:par>
+                              <p:par>
+                                <p:cTn id="51" presetID="2" presetClass="entr" presetSubtype="4" fill="hold" nodeType="withEffect">
+                                  <p:stCondLst>
+                                    <p:cond delay="0"/>
+                                  </p:stCondLst>
+                                  <p:childTnLst>
+                                    <p:set>
+                                      <p:cBhvr>
+                                        <p:cTn id="52" dur="1" fill="hold">
+                                          <p:stCondLst>
+                                            <p:cond delay="0"/>
+                                          </p:stCondLst>
+                                        </p:cTn>
+                                        <p:tgtEl>
+                                          <p:spTgt spid="40">
+                                            <p:txEl>
+                                              <p:pRg st="2" end="2"/>
+                                            </p:txEl>
+                                          </p:spTgt>
+                                        </p:tgtEl>
+                                        <p:attrNameLst>
+                                          <p:attrName>style.visibility</p:attrName>
+                                        </p:attrNameLst>
+                                      </p:cBhvr>
+                                      <p:to>
+                                        <p:strVal val="visible"/>
+                                      </p:to>
+                                    </p:set>
+                                    <p:anim calcmode="lin" valueType="num">
+                                      <p:cBhvr additive="base">
+                                        <p:cTn id="53" dur="500" fill="hold"/>
+                                        <p:tgtEl>
+                                          <p:spTgt spid="40">
+                                            <p:txEl>
+                                              <p:pRg st="2" end="2"/>
+                                            </p:txEl>
+                                          </p:spTgt>
+                                        </p:tgtEl>
+                                        <p:attrNameLst>
+                                          <p:attrName>ppt_x</p:attrName>
+                                        </p:attrNameLst>
+                                      </p:cBhvr>
+                                      <p:tavLst>
+                                        <p:tav tm="0">
+                                          <p:val>
+                                            <p:strVal val="#ppt_x"/>
+                                          </p:val>
+                                        </p:tav>
+                                        <p:tav tm="100000">
+                                          <p:val>
+                                            <p:strVal val="#ppt_x"/>
+                                          </p:val>
+                                        </p:tav>
+                                      </p:tavLst>
+                                    </p:anim>
+                                    <p:anim calcmode="lin" valueType="num">
+                                      <p:cBhvr additive="base">
+                                        <p:cTn id="54" dur="500" fill="hold"/>
+                                        <p:tgtEl>
+                                          <p:spTgt spid="40">
+                                            <p:txEl>
+                                              <p:pRg st="2" end="2"/>
+                                            </p:txEl>
+                                          </p:spTgt>
+                                        </p:tgtEl>
+                                        <p:attrNameLst>
+                                          <p:attrName>ppt_y</p:attrName>
+                                        </p:attrNameLst>
+                                      </p:cBhvr>
+                                      <p:tavLst>
+                                        <p:tav tm="0">
+                                          <p:val>
+                                            <p:strVal val="1+#ppt_h/2"/>
+                                          </p:val>
+                                        </p:tav>
+                                        <p:tav tm="100000">
+                                          <p:val>
+                                            <p:strVal val="#ppt_y"/>
+                                          </p:val>
+                                        </p:tav>
+                                      </p:tavLst>
+                                    </p:anim>
+                                  </p:childTnLst>
+                                </p:cTn>
+                              </p:par>
+                              <p:par>
+                                <p:cTn id="55" presetID="2" presetClass="entr" presetSubtype="4" fill="hold" nodeType="withEffect">
+                                  <p:stCondLst>
+                                    <p:cond delay="0"/>
+                                  </p:stCondLst>
+                                  <p:childTnLst>
+                                    <p:set>
+                                      <p:cBhvr>
+                                        <p:cTn id="56" dur="1" fill="hold">
+                                          <p:stCondLst>
+                                            <p:cond delay="0"/>
+                                          </p:stCondLst>
+                                        </p:cTn>
+                                        <p:tgtEl>
+                                          <p:spTgt spid="40">
+                                            <p:txEl>
+                                              <p:pRg st="3" end="3"/>
+                                            </p:txEl>
+                                          </p:spTgt>
+                                        </p:tgtEl>
+                                        <p:attrNameLst>
+                                          <p:attrName>style.visibility</p:attrName>
+                                        </p:attrNameLst>
+                                      </p:cBhvr>
+                                      <p:to>
+                                        <p:strVal val="visible"/>
+                                      </p:to>
+                                    </p:set>
+                                    <p:anim calcmode="lin" valueType="num">
+                                      <p:cBhvr additive="base">
+                                        <p:cTn id="57" dur="500" fill="hold"/>
+                                        <p:tgtEl>
+                                          <p:spTgt spid="40">
+                                            <p:txEl>
+                                              <p:pRg st="3" end="3"/>
+                                            </p:txEl>
+                                          </p:spTgt>
+                                        </p:tgtEl>
+                                        <p:attrNameLst>
+                                          <p:attrName>ppt_x</p:attrName>
+                                        </p:attrNameLst>
+                                      </p:cBhvr>
+                                      <p:tavLst>
+                                        <p:tav tm="0">
+                                          <p:val>
+                                            <p:strVal val="#ppt_x"/>
+                                          </p:val>
+                                        </p:tav>
+                                        <p:tav tm="100000">
+                                          <p:val>
+                                            <p:strVal val="#ppt_x"/>
+                                          </p:val>
+                                        </p:tav>
+                                      </p:tavLst>
+                                    </p:anim>
+                                    <p:anim calcmode="lin" valueType="num">
+                                      <p:cBhvr additive="base">
+                                        <p:cTn id="58" dur="500" fill="hold"/>
+                                        <p:tgtEl>
+                                          <p:spTgt spid="40">
+                                            <p:txEl>
+                                              <p:pRg st="3" end="3"/>
+                                            </p:txEl>
+                                          </p:spTgt>
+                                        </p:tgtEl>
+                                        <p:attrNameLst>
+                                          <p:attrName>ppt_y</p:attrName>
+                                        </p:attrNameLst>
+                                      </p:cBhvr>
+                                      <p:tavLst>
+                                        <p:tav tm="0">
+                                          <p:val>
+                                            <p:strVal val="1+#ppt_h/2"/>
+                                          </p:val>
+                                        </p:tav>
+                                        <p:tav tm="100000">
+                                          <p:val>
+                                            <p:strVal val="#ppt_y"/>
+                                          </p:val>
+                                        </p:tav>
+                                      </p:tavLst>
+                                    </p:anim>
+                                  </p:childTnLst>
+                                </p:cTn>
+                              </p:par>
+                              <p:par>
+                                <p:cTn id="59" presetID="2" presetClass="entr" presetSubtype="4" fill="hold" nodeType="withEffect">
+                                  <p:stCondLst>
+                                    <p:cond delay="0"/>
+                                  </p:stCondLst>
+                                  <p:childTnLst>
+                                    <p:set>
+                                      <p:cBhvr>
+                                        <p:cTn id="60" dur="1" fill="hold">
+                                          <p:stCondLst>
+                                            <p:cond delay="0"/>
+                                          </p:stCondLst>
+                                        </p:cTn>
+                                        <p:tgtEl>
+                                          <p:spTgt spid="40">
+                                            <p:txEl>
+                                              <p:pRg st="4" end="4"/>
+                                            </p:txEl>
+                                          </p:spTgt>
+                                        </p:tgtEl>
+                                        <p:attrNameLst>
+                                          <p:attrName>style.visibility</p:attrName>
+                                        </p:attrNameLst>
+                                      </p:cBhvr>
+                                      <p:to>
+                                        <p:strVal val="visible"/>
+                                      </p:to>
+                                    </p:set>
+                                    <p:anim calcmode="lin" valueType="num">
+                                      <p:cBhvr additive="base">
+                                        <p:cTn id="61" dur="500" fill="hold"/>
+                                        <p:tgtEl>
+                                          <p:spTgt spid="40">
+                                            <p:txEl>
+                                              <p:pRg st="4" end="4"/>
+                                            </p:txEl>
+                                          </p:spTgt>
+                                        </p:tgtEl>
+                                        <p:attrNameLst>
+                                          <p:attrName>ppt_x</p:attrName>
+                                        </p:attrNameLst>
+                                      </p:cBhvr>
+                                      <p:tavLst>
+                                        <p:tav tm="0">
+                                          <p:val>
+                                            <p:strVal val="#ppt_x"/>
+                                          </p:val>
+                                        </p:tav>
+                                        <p:tav tm="100000">
+                                          <p:val>
+                                            <p:strVal val="#ppt_x"/>
+                                          </p:val>
+                                        </p:tav>
+                                      </p:tavLst>
+                                    </p:anim>
+                                    <p:anim calcmode="lin" valueType="num">
+                                      <p:cBhvr additive="base">
+                                        <p:cTn id="62" dur="500" fill="hold"/>
+                                        <p:tgtEl>
+                                          <p:spTgt spid="40">
+                                            <p:txEl>
+                                              <p:pRg st="4" end="4"/>
+                                            </p:txEl>
+                                          </p:spTgt>
+                                        </p:tgtEl>
+                                        <p:attrNameLst>
+                                          <p:attrName>ppt_y</p:attrName>
+                                        </p:attrNameLst>
+                                      </p:cBhvr>
+                                      <p:tavLst>
+                                        <p:tav tm="0">
+                                          <p:val>
+                                            <p:strVal val="1+#ppt_h/2"/>
+                                          </p:val>
+                                        </p:tav>
+                                        <p:tav tm="100000">
+                                          <p:val>
+                                            <p:strVal val="#ppt_y"/>
+                                          </p:val>
+                                        </p:tav>
+                                      </p:tavLst>
+                                    </p:anim>
+                                  </p:childTnLst>
+                                </p:cTn>
+                              </p:par>
+                            </p:childTnLst>
+                          </p:cTn>
+                        </p:par>
+                      </p:childTnLst>
+                    </p:cTn>
+                  </p:par>
+                </p:childTnLst>
+              </p:cTn>
+              <p:prevCondLst>
+                <p:cond evt="onPrev" delay="0">
+                  <p:tgtEl>
+                    <p:sldTgt/>
+                  </p:tgtEl>
+                </p:cond>
+              </p:prevCondLst>
+              <p:nextCondLst>
+                <p:cond evt="onNext" delay="0">
+                  <p:tgtEl>
+                    <p:sldTgt/>
+                  </p:tgtEl>
+                </p:cond>
+              </p:nextCondLst>
+            </p:seq>
+          </p:childTnLst>
+        </p:cTn>
+      </p:par>
+    </p:tnLst>
+  </p:timing>
 </p:sld>
 </file>
 
@@ -9224,9 +11691,6 @@
                     <p:cTn id="3" fill="hold">
                       <p:stCondLst>
                         <p:cond delay="indefinite"/>
-                        <p:cond evt="onBegin" delay="0">
-                          <p:tn val="2"/>
-                        </p:cond>
                       </p:stCondLst>
                       <p:childTnLst>
                         <p:par>
@@ -9236,7 +11700,7 @@
                             </p:stCondLst>
                             <p:childTnLst>
                               <p:par>
-                                <p:cTn id="5" presetID="1" presetClass="entr" presetSubtype="0" fill="hold" nodeType="afterEffect">
+                                <p:cTn id="5" presetID="2" presetClass="entr" presetSubtype="8" fill="hold" nodeType="clickEffect">
                                   <p:stCondLst>
                                     <p:cond delay="0"/>
                                   </p:stCondLst>
@@ -9249,7 +11713,11 @@
                                           </p:stCondLst>
                                         </p:cTn>
                                         <p:tgtEl>
-                                          <p:spTgt spid="16"/>
+                                          <p:spTgt spid="13">
+                                            <p:txEl>
+                                              <p:pRg st="0" end="0"/>
+                                            </p:txEl>
+                                          </p:spTgt>
                                         </p:tgtEl>
                                         <p:attrNameLst>
                                           <p:attrName>style.visibility</p:attrName>
@@ -9259,6 +11727,487 @@
                                         <p:strVal val="visible"/>
                                       </p:to>
                                     </p:set>
+                                    <p:anim calcmode="lin" valueType="num">
+                                      <p:cBhvr additive="base">
+                                        <p:cTn id="7" dur="500" fill="hold"/>
+                                        <p:tgtEl>
+                                          <p:spTgt spid="13">
+                                            <p:txEl>
+                                              <p:pRg st="0" end="0"/>
+                                            </p:txEl>
+                                          </p:spTgt>
+                                        </p:tgtEl>
+                                        <p:attrNameLst>
+                                          <p:attrName>ppt_x</p:attrName>
+                                        </p:attrNameLst>
+                                      </p:cBhvr>
+                                      <p:tavLst>
+                                        <p:tav tm="0">
+                                          <p:val>
+                                            <p:strVal val="0-#ppt_w/2"/>
+                                          </p:val>
+                                        </p:tav>
+                                        <p:tav tm="100000">
+                                          <p:val>
+                                            <p:strVal val="#ppt_x"/>
+                                          </p:val>
+                                        </p:tav>
+                                      </p:tavLst>
+                                    </p:anim>
+                                    <p:anim calcmode="lin" valueType="num">
+                                      <p:cBhvr additive="base">
+                                        <p:cTn id="8" dur="500" fill="hold"/>
+                                        <p:tgtEl>
+                                          <p:spTgt spid="13">
+                                            <p:txEl>
+                                              <p:pRg st="0" end="0"/>
+                                            </p:txEl>
+                                          </p:spTgt>
+                                        </p:tgtEl>
+                                        <p:attrNameLst>
+                                          <p:attrName>ppt_y</p:attrName>
+                                        </p:attrNameLst>
+                                      </p:cBhvr>
+                                      <p:tavLst>
+                                        <p:tav tm="0">
+                                          <p:val>
+                                            <p:strVal val="#ppt_y"/>
+                                          </p:val>
+                                        </p:tav>
+                                        <p:tav tm="100000">
+                                          <p:val>
+                                            <p:strVal val="#ppt_y"/>
+                                          </p:val>
+                                        </p:tav>
+                                      </p:tavLst>
+                                    </p:anim>
+                                  </p:childTnLst>
+                                </p:cTn>
+                              </p:par>
+                            </p:childTnLst>
+                          </p:cTn>
+                        </p:par>
+                        <p:par>
+                          <p:cTn id="9" fill="hold">
+                            <p:stCondLst>
+                              <p:cond delay="500"/>
+                            </p:stCondLst>
+                            <p:childTnLst>
+                              <p:par>
+                                <p:cTn id="10" presetID="2" presetClass="entr" presetSubtype="8" fill="hold" nodeType="afterEffect">
+                                  <p:stCondLst>
+                                    <p:cond delay="0"/>
+                                  </p:stCondLst>
+                                  <p:childTnLst>
+                                    <p:set>
+                                      <p:cBhvr>
+                                        <p:cTn id="11" dur="1" fill="hold">
+                                          <p:stCondLst>
+                                            <p:cond delay="0"/>
+                                          </p:stCondLst>
+                                        </p:cTn>
+                                        <p:tgtEl>
+                                          <p:spTgt spid="13">
+                                            <p:txEl>
+                                              <p:pRg st="1" end="1"/>
+                                            </p:txEl>
+                                          </p:spTgt>
+                                        </p:tgtEl>
+                                        <p:attrNameLst>
+                                          <p:attrName>style.visibility</p:attrName>
+                                        </p:attrNameLst>
+                                      </p:cBhvr>
+                                      <p:to>
+                                        <p:strVal val="visible"/>
+                                      </p:to>
+                                    </p:set>
+                                    <p:anim calcmode="lin" valueType="num">
+                                      <p:cBhvr additive="base">
+                                        <p:cTn id="12" dur="500" fill="hold"/>
+                                        <p:tgtEl>
+                                          <p:spTgt spid="13">
+                                            <p:txEl>
+                                              <p:pRg st="1" end="1"/>
+                                            </p:txEl>
+                                          </p:spTgt>
+                                        </p:tgtEl>
+                                        <p:attrNameLst>
+                                          <p:attrName>ppt_x</p:attrName>
+                                        </p:attrNameLst>
+                                      </p:cBhvr>
+                                      <p:tavLst>
+                                        <p:tav tm="0">
+                                          <p:val>
+                                            <p:strVal val="0-#ppt_w/2"/>
+                                          </p:val>
+                                        </p:tav>
+                                        <p:tav tm="100000">
+                                          <p:val>
+                                            <p:strVal val="#ppt_x"/>
+                                          </p:val>
+                                        </p:tav>
+                                      </p:tavLst>
+                                    </p:anim>
+                                    <p:anim calcmode="lin" valueType="num">
+                                      <p:cBhvr additive="base">
+                                        <p:cTn id="13" dur="500" fill="hold"/>
+                                        <p:tgtEl>
+                                          <p:spTgt spid="13">
+                                            <p:txEl>
+                                              <p:pRg st="1" end="1"/>
+                                            </p:txEl>
+                                          </p:spTgt>
+                                        </p:tgtEl>
+                                        <p:attrNameLst>
+                                          <p:attrName>ppt_y</p:attrName>
+                                        </p:attrNameLst>
+                                      </p:cBhvr>
+                                      <p:tavLst>
+                                        <p:tav tm="0">
+                                          <p:val>
+                                            <p:strVal val="#ppt_y"/>
+                                          </p:val>
+                                        </p:tav>
+                                        <p:tav tm="100000">
+                                          <p:val>
+                                            <p:strVal val="#ppt_y"/>
+                                          </p:val>
+                                        </p:tav>
+                                      </p:tavLst>
+                                    </p:anim>
+                                  </p:childTnLst>
+                                </p:cTn>
+                              </p:par>
+                            </p:childTnLst>
+                          </p:cTn>
+                        </p:par>
+                        <p:par>
+                          <p:cTn id="14" fill="hold">
+                            <p:stCondLst>
+                              <p:cond delay="1000"/>
+                            </p:stCondLst>
+                            <p:childTnLst>
+                              <p:par>
+                                <p:cTn id="15" presetID="2" presetClass="entr" presetSubtype="8" fill="hold" nodeType="afterEffect">
+                                  <p:stCondLst>
+                                    <p:cond delay="0"/>
+                                  </p:stCondLst>
+                                  <p:childTnLst>
+                                    <p:set>
+                                      <p:cBhvr>
+                                        <p:cTn id="16" dur="1" fill="hold">
+                                          <p:stCondLst>
+                                            <p:cond delay="0"/>
+                                          </p:stCondLst>
+                                        </p:cTn>
+                                        <p:tgtEl>
+                                          <p:spTgt spid="13">
+                                            <p:txEl>
+                                              <p:pRg st="2" end="2"/>
+                                            </p:txEl>
+                                          </p:spTgt>
+                                        </p:tgtEl>
+                                        <p:attrNameLst>
+                                          <p:attrName>style.visibility</p:attrName>
+                                        </p:attrNameLst>
+                                      </p:cBhvr>
+                                      <p:to>
+                                        <p:strVal val="visible"/>
+                                      </p:to>
+                                    </p:set>
+                                    <p:anim calcmode="lin" valueType="num">
+                                      <p:cBhvr additive="base">
+                                        <p:cTn id="17" dur="500" fill="hold"/>
+                                        <p:tgtEl>
+                                          <p:spTgt spid="13">
+                                            <p:txEl>
+                                              <p:pRg st="2" end="2"/>
+                                            </p:txEl>
+                                          </p:spTgt>
+                                        </p:tgtEl>
+                                        <p:attrNameLst>
+                                          <p:attrName>ppt_x</p:attrName>
+                                        </p:attrNameLst>
+                                      </p:cBhvr>
+                                      <p:tavLst>
+                                        <p:tav tm="0">
+                                          <p:val>
+                                            <p:strVal val="0-#ppt_w/2"/>
+                                          </p:val>
+                                        </p:tav>
+                                        <p:tav tm="100000">
+                                          <p:val>
+                                            <p:strVal val="#ppt_x"/>
+                                          </p:val>
+                                        </p:tav>
+                                      </p:tavLst>
+                                    </p:anim>
+                                    <p:anim calcmode="lin" valueType="num">
+                                      <p:cBhvr additive="base">
+                                        <p:cTn id="18" dur="500" fill="hold"/>
+                                        <p:tgtEl>
+                                          <p:spTgt spid="13">
+                                            <p:txEl>
+                                              <p:pRg st="2" end="2"/>
+                                            </p:txEl>
+                                          </p:spTgt>
+                                        </p:tgtEl>
+                                        <p:attrNameLst>
+                                          <p:attrName>ppt_y</p:attrName>
+                                        </p:attrNameLst>
+                                      </p:cBhvr>
+                                      <p:tavLst>
+                                        <p:tav tm="0">
+                                          <p:val>
+                                            <p:strVal val="#ppt_y"/>
+                                          </p:val>
+                                        </p:tav>
+                                        <p:tav tm="100000">
+                                          <p:val>
+                                            <p:strVal val="#ppt_y"/>
+                                          </p:val>
+                                        </p:tav>
+                                      </p:tavLst>
+                                    </p:anim>
+                                  </p:childTnLst>
+                                </p:cTn>
+                              </p:par>
+                            </p:childTnLst>
+                          </p:cTn>
+                        </p:par>
+                        <p:par>
+                          <p:cTn id="19" fill="hold">
+                            <p:stCondLst>
+                              <p:cond delay="1500"/>
+                            </p:stCondLst>
+                            <p:childTnLst>
+                              <p:par>
+                                <p:cTn id="20" presetID="2" presetClass="entr" presetSubtype="8" fill="hold" nodeType="afterEffect">
+                                  <p:stCondLst>
+                                    <p:cond delay="0"/>
+                                  </p:stCondLst>
+                                  <p:childTnLst>
+                                    <p:set>
+                                      <p:cBhvr>
+                                        <p:cTn id="21" dur="1" fill="hold">
+                                          <p:stCondLst>
+                                            <p:cond delay="0"/>
+                                          </p:stCondLst>
+                                        </p:cTn>
+                                        <p:tgtEl>
+                                          <p:spTgt spid="13">
+                                            <p:txEl>
+                                              <p:pRg st="3" end="3"/>
+                                            </p:txEl>
+                                          </p:spTgt>
+                                        </p:tgtEl>
+                                        <p:attrNameLst>
+                                          <p:attrName>style.visibility</p:attrName>
+                                        </p:attrNameLst>
+                                      </p:cBhvr>
+                                      <p:to>
+                                        <p:strVal val="visible"/>
+                                      </p:to>
+                                    </p:set>
+                                    <p:anim calcmode="lin" valueType="num">
+                                      <p:cBhvr additive="base">
+                                        <p:cTn id="22" dur="500" fill="hold"/>
+                                        <p:tgtEl>
+                                          <p:spTgt spid="13">
+                                            <p:txEl>
+                                              <p:pRg st="3" end="3"/>
+                                            </p:txEl>
+                                          </p:spTgt>
+                                        </p:tgtEl>
+                                        <p:attrNameLst>
+                                          <p:attrName>ppt_x</p:attrName>
+                                        </p:attrNameLst>
+                                      </p:cBhvr>
+                                      <p:tavLst>
+                                        <p:tav tm="0">
+                                          <p:val>
+                                            <p:strVal val="0-#ppt_w/2"/>
+                                          </p:val>
+                                        </p:tav>
+                                        <p:tav tm="100000">
+                                          <p:val>
+                                            <p:strVal val="#ppt_x"/>
+                                          </p:val>
+                                        </p:tav>
+                                      </p:tavLst>
+                                    </p:anim>
+                                    <p:anim calcmode="lin" valueType="num">
+                                      <p:cBhvr additive="base">
+                                        <p:cTn id="23" dur="500" fill="hold"/>
+                                        <p:tgtEl>
+                                          <p:spTgt spid="13">
+                                            <p:txEl>
+                                              <p:pRg st="3" end="3"/>
+                                            </p:txEl>
+                                          </p:spTgt>
+                                        </p:tgtEl>
+                                        <p:attrNameLst>
+                                          <p:attrName>ppt_y</p:attrName>
+                                        </p:attrNameLst>
+                                      </p:cBhvr>
+                                      <p:tavLst>
+                                        <p:tav tm="0">
+                                          <p:val>
+                                            <p:strVal val="#ppt_y"/>
+                                          </p:val>
+                                        </p:tav>
+                                        <p:tav tm="100000">
+                                          <p:val>
+                                            <p:strVal val="#ppt_y"/>
+                                          </p:val>
+                                        </p:tav>
+                                      </p:tavLst>
+                                    </p:anim>
+                                  </p:childTnLst>
+                                </p:cTn>
+                              </p:par>
+                            </p:childTnLst>
+                          </p:cTn>
+                        </p:par>
+                      </p:childTnLst>
+                    </p:cTn>
+                  </p:par>
+                  <p:par>
+                    <p:cTn id="24" fill="hold">
+                      <p:stCondLst>
+                        <p:cond delay="indefinite"/>
+                      </p:stCondLst>
+                      <p:childTnLst>
+                        <p:par>
+                          <p:cTn id="25" fill="hold">
+                            <p:stCondLst>
+                              <p:cond delay="0"/>
+                            </p:stCondLst>
+                            <p:childTnLst>
+                              <p:par>
+                                <p:cTn id="26" presetID="53" presetClass="entr" presetSubtype="528" fill="hold" nodeType="clickEffect">
+                                  <p:stCondLst>
+                                    <p:cond delay="0"/>
+                                  </p:stCondLst>
+                                  <p:childTnLst>
+                                    <p:set>
+                                      <p:cBhvr>
+                                        <p:cTn id="27" dur="1" fill="hold">
+                                          <p:stCondLst>
+                                            <p:cond delay="0"/>
+                                          </p:stCondLst>
+                                        </p:cTn>
+                                        <p:tgtEl>
+                                          <p:spTgt spid="16"/>
+                                        </p:tgtEl>
+                                        <p:attrNameLst>
+                                          <p:attrName>style.visibility</p:attrName>
+                                        </p:attrNameLst>
+                                      </p:cBhvr>
+                                      <p:to>
+                                        <p:strVal val="visible"/>
+                                      </p:to>
+                                    </p:set>
+                                    <p:anim calcmode="lin" valueType="num">
+                                      <p:cBhvr>
+                                        <p:cTn id="28" dur="500" fill="hold"/>
+                                        <p:tgtEl>
+                                          <p:spTgt spid="16"/>
+                                        </p:tgtEl>
+                                        <p:attrNameLst>
+                                          <p:attrName>ppt_w</p:attrName>
+                                        </p:attrNameLst>
+                                      </p:cBhvr>
+                                      <p:tavLst>
+                                        <p:tav tm="0">
+                                          <p:val>
+                                            <p:fltVal val="0"/>
+                                          </p:val>
+                                        </p:tav>
+                                        <p:tav tm="100000">
+                                          <p:val>
+                                            <p:strVal val="#ppt_w"/>
+                                          </p:val>
+                                        </p:tav>
+                                      </p:tavLst>
+                                    </p:anim>
+                                    <p:anim calcmode="lin" valueType="num">
+                                      <p:cBhvr>
+                                        <p:cTn id="29" dur="500" fill="hold"/>
+                                        <p:tgtEl>
+                                          <p:spTgt spid="16"/>
+                                        </p:tgtEl>
+                                        <p:attrNameLst>
+                                          <p:attrName>ppt_h</p:attrName>
+                                        </p:attrNameLst>
+                                      </p:cBhvr>
+                                      <p:tavLst>
+                                        <p:tav tm="0">
+                                          <p:val>
+                                            <p:fltVal val="0"/>
+                                          </p:val>
+                                        </p:tav>
+                                        <p:tav tm="100000">
+                                          <p:val>
+                                            <p:strVal val="#ppt_h"/>
+                                          </p:val>
+                                        </p:tav>
+                                      </p:tavLst>
+                                    </p:anim>
+                                    <p:animEffect transition="in" filter="fade">
+                                      <p:cBhvr>
+                                        <p:cTn id="30" dur="500"/>
+                                        <p:tgtEl>
+                                          <p:spTgt spid="16"/>
+                                        </p:tgtEl>
+                                      </p:cBhvr>
+                                    </p:animEffect>
+                                    <p:anim calcmode="lin" valueType="num">
+                                      <p:cBhvr>
+                                        <p:cTn id="31" dur="500" fill="hold"/>
+                                        <p:tgtEl>
+                                          <p:spTgt spid="16"/>
+                                        </p:tgtEl>
+                                        <p:attrNameLst>
+                                          <p:attrName>ppt_x</p:attrName>
+                                        </p:attrNameLst>
+                                      </p:cBhvr>
+                                      <p:tavLst>
+                                        <p:tav tm="0">
+                                          <p:val>
+                                            <p:fltVal val="0.5"/>
+                                          </p:val>
+                                        </p:tav>
+                                        <p:tav tm="100000">
+                                          <p:val>
+                                            <p:strVal val="#ppt_x"/>
+                                          </p:val>
+                                        </p:tav>
+                                      </p:tavLst>
+                                    </p:anim>
+                                    <p:anim calcmode="lin" valueType="num">
+                                      <p:cBhvr>
+                                        <p:cTn id="32" dur="500" fill="hold"/>
+                                        <p:tgtEl>
+                                          <p:spTgt spid="16"/>
+                                        </p:tgtEl>
+                                        <p:attrNameLst>
+                                          <p:attrName>ppt_y</p:attrName>
+                                        </p:attrNameLst>
+                                      </p:cBhvr>
+                                      <p:tavLst>
+                                        <p:tav tm="0">
+                                          <p:val>
+                                            <p:fltVal val="0.5"/>
+                                          </p:val>
+                                        </p:tav>
+                                        <p:tav tm="100000">
+                                          <p:val>
+                                            <p:strVal val="#ppt_y"/>
+                                          </p:val>
+                                        </p:tav>
+                                      </p:tavLst>
+                                    </p:anim>
                                   </p:childTnLst>
                                 </p:cTn>
                               </p:par>
@@ -10142,6 +13091,1011 @@
       </p:transition>
     </mc:Fallback>
   </mc:AlternateContent>
+  <p:timing>
+    <p:tnLst>
+      <p:par>
+        <p:cTn id="1" dur="indefinite" restart="never" nodeType="tmRoot">
+          <p:childTnLst>
+            <p:seq concurrent="1" nextAc="seek">
+              <p:cTn id="2" dur="indefinite" nodeType="mainSeq">
+                <p:childTnLst>
+                  <p:par>
+                    <p:cTn id="3" fill="hold">
+                      <p:stCondLst>
+                        <p:cond delay="indefinite"/>
+                      </p:stCondLst>
+                      <p:childTnLst>
+                        <p:par>
+                          <p:cTn id="4" fill="hold">
+                            <p:stCondLst>
+                              <p:cond delay="0"/>
+                            </p:stCondLst>
+                            <p:childTnLst>
+                              <p:par>
+                                <p:cTn id="5" presetID="10" presetClass="entr" presetSubtype="0" fill="hold" nodeType="clickEffect">
+                                  <p:stCondLst>
+                                    <p:cond delay="0"/>
+                                  </p:stCondLst>
+                                  <p:childTnLst>
+                                    <p:set>
+                                      <p:cBhvr>
+                                        <p:cTn id="6" dur="1" fill="hold">
+                                          <p:stCondLst>
+                                            <p:cond delay="0"/>
+                                          </p:stCondLst>
+                                        </p:cTn>
+                                        <p:tgtEl>
+                                          <p:spTgt spid="15">
+                                            <p:txEl>
+                                              <p:pRg st="0" end="0"/>
+                                            </p:txEl>
+                                          </p:spTgt>
+                                        </p:tgtEl>
+                                        <p:attrNameLst>
+                                          <p:attrName>style.visibility</p:attrName>
+                                        </p:attrNameLst>
+                                      </p:cBhvr>
+                                      <p:to>
+                                        <p:strVal val="visible"/>
+                                      </p:to>
+                                    </p:set>
+                                    <p:animEffect transition="in" filter="fade">
+                                      <p:cBhvr>
+                                        <p:cTn id="7" dur="500"/>
+                                        <p:tgtEl>
+                                          <p:spTgt spid="15">
+                                            <p:txEl>
+                                              <p:pRg st="0" end="0"/>
+                                            </p:txEl>
+                                          </p:spTgt>
+                                        </p:tgtEl>
+                                      </p:cBhvr>
+                                    </p:animEffect>
+                                  </p:childTnLst>
+                                </p:cTn>
+                              </p:par>
+                            </p:childTnLst>
+                          </p:cTn>
+                        </p:par>
+                        <p:par>
+                          <p:cTn id="8" fill="hold">
+                            <p:stCondLst>
+                              <p:cond delay="500"/>
+                            </p:stCondLst>
+                            <p:childTnLst>
+                              <p:par>
+                                <p:cTn id="9" presetID="2" presetClass="entr" presetSubtype="2" fill="hold" nodeType="afterEffect">
+                                  <p:stCondLst>
+                                    <p:cond delay="0"/>
+                                  </p:stCondLst>
+                                  <p:childTnLst>
+                                    <p:set>
+                                      <p:cBhvr>
+                                        <p:cTn id="10" dur="1" fill="hold">
+                                          <p:stCondLst>
+                                            <p:cond delay="0"/>
+                                          </p:stCondLst>
+                                        </p:cTn>
+                                        <p:tgtEl>
+                                          <p:spTgt spid="23">
+                                            <p:txEl>
+                                              <p:pRg st="0" end="0"/>
+                                            </p:txEl>
+                                          </p:spTgt>
+                                        </p:tgtEl>
+                                        <p:attrNameLst>
+                                          <p:attrName>style.visibility</p:attrName>
+                                        </p:attrNameLst>
+                                      </p:cBhvr>
+                                      <p:to>
+                                        <p:strVal val="visible"/>
+                                      </p:to>
+                                    </p:set>
+                                    <p:anim calcmode="lin" valueType="num">
+                                      <p:cBhvr additive="base">
+                                        <p:cTn id="11" dur="500" fill="hold"/>
+                                        <p:tgtEl>
+                                          <p:spTgt spid="23">
+                                            <p:txEl>
+                                              <p:pRg st="0" end="0"/>
+                                            </p:txEl>
+                                          </p:spTgt>
+                                        </p:tgtEl>
+                                        <p:attrNameLst>
+                                          <p:attrName>ppt_x</p:attrName>
+                                        </p:attrNameLst>
+                                      </p:cBhvr>
+                                      <p:tavLst>
+                                        <p:tav tm="0">
+                                          <p:val>
+                                            <p:strVal val="1+#ppt_w/2"/>
+                                          </p:val>
+                                        </p:tav>
+                                        <p:tav tm="100000">
+                                          <p:val>
+                                            <p:strVal val="#ppt_x"/>
+                                          </p:val>
+                                        </p:tav>
+                                      </p:tavLst>
+                                    </p:anim>
+                                    <p:anim calcmode="lin" valueType="num">
+                                      <p:cBhvr additive="base">
+                                        <p:cTn id="12" dur="500" fill="hold"/>
+                                        <p:tgtEl>
+                                          <p:spTgt spid="23">
+                                            <p:txEl>
+                                              <p:pRg st="0" end="0"/>
+                                            </p:txEl>
+                                          </p:spTgt>
+                                        </p:tgtEl>
+                                        <p:attrNameLst>
+                                          <p:attrName>ppt_y</p:attrName>
+                                        </p:attrNameLst>
+                                      </p:cBhvr>
+                                      <p:tavLst>
+                                        <p:tav tm="0">
+                                          <p:val>
+                                            <p:strVal val="#ppt_y"/>
+                                          </p:val>
+                                        </p:tav>
+                                        <p:tav tm="100000">
+                                          <p:val>
+                                            <p:strVal val="#ppt_y"/>
+                                          </p:val>
+                                        </p:tav>
+                                      </p:tavLst>
+                                    </p:anim>
+                                  </p:childTnLst>
+                                </p:cTn>
+                              </p:par>
+                            </p:childTnLst>
+                          </p:cTn>
+                        </p:par>
+                      </p:childTnLst>
+                    </p:cTn>
+                  </p:par>
+                  <p:par>
+                    <p:cTn id="13" fill="hold">
+                      <p:stCondLst>
+                        <p:cond delay="indefinite"/>
+                      </p:stCondLst>
+                      <p:childTnLst>
+                        <p:par>
+                          <p:cTn id="14" fill="hold">
+                            <p:stCondLst>
+                              <p:cond delay="0"/>
+                            </p:stCondLst>
+                            <p:childTnLst>
+                              <p:par>
+                                <p:cTn id="15" presetID="10" presetClass="entr" presetSubtype="0" fill="hold" nodeType="clickEffect">
+                                  <p:stCondLst>
+                                    <p:cond delay="0"/>
+                                  </p:stCondLst>
+                                  <p:childTnLst>
+                                    <p:set>
+                                      <p:cBhvr>
+                                        <p:cTn id="16" dur="1" fill="hold">
+                                          <p:stCondLst>
+                                            <p:cond delay="0"/>
+                                          </p:stCondLst>
+                                        </p:cTn>
+                                        <p:tgtEl>
+                                          <p:spTgt spid="18">
+                                            <p:txEl>
+                                              <p:pRg st="0" end="0"/>
+                                            </p:txEl>
+                                          </p:spTgt>
+                                        </p:tgtEl>
+                                        <p:attrNameLst>
+                                          <p:attrName>style.visibility</p:attrName>
+                                        </p:attrNameLst>
+                                      </p:cBhvr>
+                                      <p:to>
+                                        <p:strVal val="visible"/>
+                                      </p:to>
+                                    </p:set>
+                                    <p:animEffect transition="in" filter="fade">
+                                      <p:cBhvr>
+                                        <p:cTn id="17" dur="500"/>
+                                        <p:tgtEl>
+                                          <p:spTgt spid="18">
+                                            <p:txEl>
+                                              <p:pRg st="0" end="0"/>
+                                            </p:txEl>
+                                          </p:spTgt>
+                                        </p:tgtEl>
+                                      </p:cBhvr>
+                                    </p:animEffect>
+                                  </p:childTnLst>
+                                </p:cTn>
+                              </p:par>
+                            </p:childTnLst>
+                          </p:cTn>
+                        </p:par>
+                        <p:par>
+                          <p:cTn id="18" fill="hold">
+                            <p:stCondLst>
+                              <p:cond delay="500"/>
+                            </p:stCondLst>
+                            <p:childTnLst>
+                              <p:par>
+                                <p:cTn id="19" presetID="2" presetClass="entr" presetSubtype="4" fill="hold" nodeType="afterEffect">
+                                  <p:stCondLst>
+                                    <p:cond delay="0"/>
+                                  </p:stCondLst>
+                                  <p:childTnLst>
+                                    <p:set>
+                                      <p:cBhvr>
+                                        <p:cTn id="20" dur="1" fill="hold">
+                                          <p:stCondLst>
+                                            <p:cond delay="0"/>
+                                          </p:stCondLst>
+                                        </p:cTn>
+                                        <p:tgtEl>
+                                          <p:spTgt spid="39">
+                                            <p:txEl>
+                                              <p:pRg st="0" end="0"/>
+                                            </p:txEl>
+                                          </p:spTgt>
+                                        </p:tgtEl>
+                                        <p:attrNameLst>
+                                          <p:attrName>style.visibility</p:attrName>
+                                        </p:attrNameLst>
+                                      </p:cBhvr>
+                                      <p:to>
+                                        <p:strVal val="visible"/>
+                                      </p:to>
+                                    </p:set>
+                                    <p:anim calcmode="lin" valueType="num">
+                                      <p:cBhvr additive="base">
+                                        <p:cTn id="21" dur="500" fill="hold"/>
+                                        <p:tgtEl>
+                                          <p:spTgt spid="39">
+                                            <p:txEl>
+                                              <p:pRg st="0" end="0"/>
+                                            </p:txEl>
+                                          </p:spTgt>
+                                        </p:tgtEl>
+                                        <p:attrNameLst>
+                                          <p:attrName>ppt_x</p:attrName>
+                                        </p:attrNameLst>
+                                      </p:cBhvr>
+                                      <p:tavLst>
+                                        <p:tav tm="0">
+                                          <p:val>
+                                            <p:strVal val="#ppt_x"/>
+                                          </p:val>
+                                        </p:tav>
+                                        <p:tav tm="100000">
+                                          <p:val>
+                                            <p:strVal val="#ppt_x"/>
+                                          </p:val>
+                                        </p:tav>
+                                      </p:tavLst>
+                                    </p:anim>
+                                    <p:anim calcmode="lin" valueType="num">
+                                      <p:cBhvr additive="base">
+                                        <p:cTn id="22" dur="500" fill="hold"/>
+                                        <p:tgtEl>
+                                          <p:spTgt spid="39">
+                                            <p:txEl>
+                                              <p:pRg st="0" end="0"/>
+                                            </p:txEl>
+                                          </p:spTgt>
+                                        </p:tgtEl>
+                                        <p:attrNameLst>
+                                          <p:attrName>ppt_y</p:attrName>
+                                        </p:attrNameLst>
+                                      </p:cBhvr>
+                                      <p:tavLst>
+                                        <p:tav tm="0">
+                                          <p:val>
+                                            <p:strVal val="1+#ppt_h/2"/>
+                                          </p:val>
+                                        </p:tav>
+                                        <p:tav tm="100000">
+                                          <p:val>
+                                            <p:strVal val="#ppt_y"/>
+                                          </p:val>
+                                        </p:tav>
+                                      </p:tavLst>
+                                    </p:anim>
+                                  </p:childTnLst>
+                                </p:cTn>
+                              </p:par>
+                              <p:par>
+                                <p:cTn id="23" presetID="2" presetClass="entr" presetSubtype="4" fill="hold" nodeType="withEffect">
+                                  <p:stCondLst>
+                                    <p:cond delay="0"/>
+                                  </p:stCondLst>
+                                  <p:childTnLst>
+                                    <p:set>
+                                      <p:cBhvr>
+                                        <p:cTn id="24" dur="1" fill="hold">
+                                          <p:stCondLst>
+                                            <p:cond delay="0"/>
+                                          </p:stCondLst>
+                                        </p:cTn>
+                                        <p:tgtEl>
+                                          <p:spTgt spid="39">
+                                            <p:txEl>
+                                              <p:pRg st="1" end="1"/>
+                                            </p:txEl>
+                                          </p:spTgt>
+                                        </p:tgtEl>
+                                        <p:attrNameLst>
+                                          <p:attrName>style.visibility</p:attrName>
+                                        </p:attrNameLst>
+                                      </p:cBhvr>
+                                      <p:to>
+                                        <p:strVal val="visible"/>
+                                      </p:to>
+                                    </p:set>
+                                    <p:anim calcmode="lin" valueType="num">
+                                      <p:cBhvr additive="base">
+                                        <p:cTn id="25" dur="500" fill="hold"/>
+                                        <p:tgtEl>
+                                          <p:spTgt spid="39">
+                                            <p:txEl>
+                                              <p:pRg st="1" end="1"/>
+                                            </p:txEl>
+                                          </p:spTgt>
+                                        </p:tgtEl>
+                                        <p:attrNameLst>
+                                          <p:attrName>ppt_x</p:attrName>
+                                        </p:attrNameLst>
+                                      </p:cBhvr>
+                                      <p:tavLst>
+                                        <p:tav tm="0">
+                                          <p:val>
+                                            <p:strVal val="#ppt_x"/>
+                                          </p:val>
+                                        </p:tav>
+                                        <p:tav tm="100000">
+                                          <p:val>
+                                            <p:strVal val="#ppt_x"/>
+                                          </p:val>
+                                        </p:tav>
+                                      </p:tavLst>
+                                    </p:anim>
+                                    <p:anim calcmode="lin" valueType="num">
+                                      <p:cBhvr additive="base">
+                                        <p:cTn id="26" dur="500" fill="hold"/>
+                                        <p:tgtEl>
+                                          <p:spTgt spid="39">
+                                            <p:txEl>
+                                              <p:pRg st="1" end="1"/>
+                                            </p:txEl>
+                                          </p:spTgt>
+                                        </p:tgtEl>
+                                        <p:attrNameLst>
+                                          <p:attrName>ppt_y</p:attrName>
+                                        </p:attrNameLst>
+                                      </p:cBhvr>
+                                      <p:tavLst>
+                                        <p:tav tm="0">
+                                          <p:val>
+                                            <p:strVal val="1+#ppt_h/2"/>
+                                          </p:val>
+                                        </p:tav>
+                                        <p:tav tm="100000">
+                                          <p:val>
+                                            <p:strVal val="#ppt_y"/>
+                                          </p:val>
+                                        </p:tav>
+                                      </p:tavLst>
+                                    </p:anim>
+                                  </p:childTnLst>
+                                </p:cTn>
+                              </p:par>
+                              <p:par>
+                                <p:cTn id="27" presetID="2" presetClass="entr" presetSubtype="4" fill="hold" nodeType="withEffect">
+                                  <p:stCondLst>
+                                    <p:cond delay="0"/>
+                                  </p:stCondLst>
+                                  <p:childTnLst>
+                                    <p:set>
+                                      <p:cBhvr>
+                                        <p:cTn id="28" dur="1" fill="hold">
+                                          <p:stCondLst>
+                                            <p:cond delay="0"/>
+                                          </p:stCondLst>
+                                        </p:cTn>
+                                        <p:tgtEl>
+                                          <p:spTgt spid="39">
+                                            <p:txEl>
+                                              <p:pRg st="2" end="2"/>
+                                            </p:txEl>
+                                          </p:spTgt>
+                                        </p:tgtEl>
+                                        <p:attrNameLst>
+                                          <p:attrName>style.visibility</p:attrName>
+                                        </p:attrNameLst>
+                                      </p:cBhvr>
+                                      <p:to>
+                                        <p:strVal val="visible"/>
+                                      </p:to>
+                                    </p:set>
+                                    <p:anim calcmode="lin" valueType="num">
+                                      <p:cBhvr additive="base">
+                                        <p:cTn id="29" dur="500" fill="hold"/>
+                                        <p:tgtEl>
+                                          <p:spTgt spid="39">
+                                            <p:txEl>
+                                              <p:pRg st="2" end="2"/>
+                                            </p:txEl>
+                                          </p:spTgt>
+                                        </p:tgtEl>
+                                        <p:attrNameLst>
+                                          <p:attrName>ppt_x</p:attrName>
+                                        </p:attrNameLst>
+                                      </p:cBhvr>
+                                      <p:tavLst>
+                                        <p:tav tm="0">
+                                          <p:val>
+                                            <p:strVal val="#ppt_x"/>
+                                          </p:val>
+                                        </p:tav>
+                                        <p:tav tm="100000">
+                                          <p:val>
+                                            <p:strVal val="#ppt_x"/>
+                                          </p:val>
+                                        </p:tav>
+                                      </p:tavLst>
+                                    </p:anim>
+                                    <p:anim calcmode="lin" valueType="num">
+                                      <p:cBhvr additive="base">
+                                        <p:cTn id="30" dur="500" fill="hold"/>
+                                        <p:tgtEl>
+                                          <p:spTgt spid="39">
+                                            <p:txEl>
+                                              <p:pRg st="2" end="2"/>
+                                            </p:txEl>
+                                          </p:spTgt>
+                                        </p:tgtEl>
+                                        <p:attrNameLst>
+                                          <p:attrName>ppt_y</p:attrName>
+                                        </p:attrNameLst>
+                                      </p:cBhvr>
+                                      <p:tavLst>
+                                        <p:tav tm="0">
+                                          <p:val>
+                                            <p:strVal val="1+#ppt_h/2"/>
+                                          </p:val>
+                                        </p:tav>
+                                        <p:tav tm="100000">
+                                          <p:val>
+                                            <p:strVal val="#ppt_y"/>
+                                          </p:val>
+                                        </p:tav>
+                                      </p:tavLst>
+                                    </p:anim>
+                                  </p:childTnLst>
+                                </p:cTn>
+                              </p:par>
+                              <p:par>
+                                <p:cTn id="31" presetID="2" presetClass="entr" presetSubtype="4" fill="hold" nodeType="withEffect">
+                                  <p:stCondLst>
+                                    <p:cond delay="0"/>
+                                  </p:stCondLst>
+                                  <p:childTnLst>
+                                    <p:set>
+                                      <p:cBhvr>
+                                        <p:cTn id="32" dur="1" fill="hold">
+                                          <p:stCondLst>
+                                            <p:cond delay="0"/>
+                                          </p:stCondLst>
+                                        </p:cTn>
+                                        <p:tgtEl>
+                                          <p:spTgt spid="39">
+                                            <p:txEl>
+                                              <p:pRg st="3" end="3"/>
+                                            </p:txEl>
+                                          </p:spTgt>
+                                        </p:tgtEl>
+                                        <p:attrNameLst>
+                                          <p:attrName>style.visibility</p:attrName>
+                                        </p:attrNameLst>
+                                      </p:cBhvr>
+                                      <p:to>
+                                        <p:strVal val="visible"/>
+                                      </p:to>
+                                    </p:set>
+                                    <p:anim calcmode="lin" valueType="num">
+                                      <p:cBhvr additive="base">
+                                        <p:cTn id="33" dur="500" fill="hold"/>
+                                        <p:tgtEl>
+                                          <p:spTgt spid="39">
+                                            <p:txEl>
+                                              <p:pRg st="3" end="3"/>
+                                            </p:txEl>
+                                          </p:spTgt>
+                                        </p:tgtEl>
+                                        <p:attrNameLst>
+                                          <p:attrName>ppt_x</p:attrName>
+                                        </p:attrNameLst>
+                                      </p:cBhvr>
+                                      <p:tavLst>
+                                        <p:tav tm="0">
+                                          <p:val>
+                                            <p:strVal val="#ppt_x"/>
+                                          </p:val>
+                                        </p:tav>
+                                        <p:tav tm="100000">
+                                          <p:val>
+                                            <p:strVal val="#ppt_x"/>
+                                          </p:val>
+                                        </p:tav>
+                                      </p:tavLst>
+                                    </p:anim>
+                                    <p:anim calcmode="lin" valueType="num">
+                                      <p:cBhvr additive="base">
+                                        <p:cTn id="34" dur="500" fill="hold"/>
+                                        <p:tgtEl>
+                                          <p:spTgt spid="39">
+                                            <p:txEl>
+                                              <p:pRg st="3" end="3"/>
+                                            </p:txEl>
+                                          </p:spTgt>
+                                        </p:tgtEl>
+                                        <p:attrNameLst>
+                                          <p:attrName>ppt_y</p:attrName>
+                                        </p:attrNameLst>
+                                      </p:cBhvr>
+                                      <p:tavLst>
+                                        <p:tav tm="0">
+                                          <p:val>
+                                            <p:strVal val="1+#ppt_h/2"/>
+                                          </p:val>
+                                        </p:tav>
+                                        <p:tav tm="100000">
+                                          <p:val>
+                                            <p:strVal val="#ppt_y"/>
+                                          </p:val>
+                                        </p:tav>
+                                      </p:tavLst>
+                                    </p:anim>
+                                  </p:childTnLst>
+                                </p:cTn>
+                              </p:par>
+                            </p:childTnLst>
+                          </p:cTn>
+                        </p:par>
+                      </p:childTnLst>
+                    </p:cTn>
+                  </p:par>
+                  <p:par>
+                    <p:cTn id="35" fill="hold">
+                      <p:stCondLst>
+                        <p:cond delay="indefinite"/>
+                      </p:stCondLst>
+                      <p:childTnLst>
+                        <p:par>
+                          <p:cTn id="36" fill="hold">
+                            <p:stCondLst>
+                              <p:cond delay="0"/>
+                            </p:stCondLst>
+                            <p:childTnLst>
+                              <p:par>
+                                <p:cTn id="37" presetID="10" presetClass="entr" presetSubtype="0" fill="hold" nodeType="clickEffect">
+                                  <p:stCondLst>
+                                    <p:cond delay="0"/>
+                                  </p:stCondLst>
+                                  <p:childTnLst>
+                                    <p:set>
+                                      <p:cBhvr>
+                                        <p:cTn id="38" dur="1" fill="hold">
+                                          <p:stCondLst>
+                                            <p:cond delay="0"/>
+                                          </p:stCondLst>
+                                        </p:cTn>
+                                        <p:tgtEl>
+                                          <p:spTgt spid="19">
+                                            <p:txEl>
+                                              <p:pRg st="0" end="0"/>
+                                            </p:txEl>
+                                          </p:spTgt>
+                                        </p:tgtEl>
+                                        <p:attrNameLst>
+                                          <p:attrName>style.visibility</p:attrName>
+                                        </p:attrNameLst>
+                                      </p:cBhvr>
+                                      <p:to>
+                                        <p:strVal val="visible"/>
+                                      </p:to>
+                                    </p:set>
+                                    <p:animEffect transition="in" filter="fade">
+                                      <p:cBhvr>
+                                        <p:cTn id="39" dur="500"/>
+                                        <p:tgtEl>
+                                          <p:spTgt spid="19">
+                                            <p:txEl>
+                                              <p:pRg st="0" end="0"/>
+                                            </p:txEl>
+                                          </p:spTgt>
+                                        </p:tgtEl>
+                                      </p:cBhvr>
+                                    </p:animEffect>
+                                  </p:childTnLst>
+                                </p:cTn>
+                              </p:par>
+                            </p:childTnLst>
+                          </p:cTn>
+                        </p:par>
+                        <p:par>
+                          <p:cTn id="40" fill="hold">
+                            <p:stCondLst>
+                              <p:cond delay="500"/>
+                            </p:stCondLst>
+                            <p:childTnLst>
+                              <p:par>
+                                <p:cTn id="41" presetID="2" presetClass="entr" presetSubtype="4" fill="hold" nodeType="afterEffect">
+                                  <p:stCondLst>
+                                    <p:cond delay="0"/>
+                                  </p:stCondLst>
+                                  <p:childTnLst>
+                                    <p:set>
+                                      <p:cBhvr>
+                                        <p:cTn id="42" dur="1" fill="hold">
+                                          <p:stCondLst>
+                                            <p:cond delay="0"/>
+                                          </p:stCondLst>
+                                        </p:cTn>
+                                        <p:tgtEl>
+                                          <p:spTgt spid="40">
+                                            <p:txEl>
+                                              <p:pRg st="0" end="0"/>
+                                            </p:txEl>
+                                          </p:spTgt>
+                                        </p:tgtEl>
+                                        <p:attrNameLst>
+                                          <p:attrName>style.visibility</p:attrName>
+                                        </p:attrNameLst>
+                                      </p:cBhvr>
+                                      <p:to>
+                                        <p:strVal val="visible"/>
+                                      </p:to>
+                                    </p:set>
+                                    <p:anim calcmode="lin" valueType="num">
+                                      <p:cBhvr additive="base">
+                                        <p:cTn id="43" dur="500" fill="hold"/>
+                                        <p:tgtEl>
+                                          <p:spTgt spid="40">
+                                            <p:txEl>
+                                              <p:pRg st="0" end="0"/>
+                                            </p:txEl>
+                                          </p:spTgt>
+                                        </p:tgtEl>
+                                        <p:attrNameLst>
+                                          <p:attrName>ppt_x</p:attrName>
+                                        </p:attrNameLst>
+                                      </p:cBhvr>
+                                      <p:tavLst>
+                                        <p:tav tm="0">
+                                          <p:val>
+                                            <p:strVal val="#ppt_x"/>
+                                          </p:val>
+                                        </p:tav>
+                                        <p:tav tm="100000">
+                                          <p:val>
+                                            <p:strVal val="#ppt_x"/>
+                                          </p:val>
+                                        </p:tav>
+                                      </p:tavLst>
+                                    </p:anim>
+                                    <p:anim calcmode="lin" valueType="num">
+                                      <p:cBhvr additive="base">
+                                        <p:cTn id="44" dur="500" fill="hold"/>
+                                        <p:tgtEl>
+                                          <p:spTgt spid="40">
+                                            <p:txEl>
+                                              <p:pRg st="0" end="0"/>
+                                            </p:txEl>
+                                          </p:spTgt>
+                                        </p:tgtEl>
+                                        <p:attrNameLst>
+                                          <p:attrName>ppt_y</p:attrName>
+                                        </p:attrNameLst>
+                                      </p:cBhvr>
+                                      <p:tavLst>
+                                        <p:tav tm="0">
+                                          <p:val>
+                                            <p:strVal val="1+#ppt_h/2"/>
+                                          </p:val>
+                                        </p:tav>
+                                        <p:tav tm="100000">
+                                          <p:val>
+                                            <p:strVal val="#ppt_y"/>
+                                          </p:val>
+                                        </p:tav>
+                                      </p:tavLst>
+                                    </p:anim>
+                                  </p:childTnLst>
+                                </p:cTn>
+                              </p:par>
+                              <p:par>
+                                <p:cTn id="45" presetID="2" presetClass="entr" presetSubtype="4" fill="hold" nodeType="withEffect">
+                                  <p:stCondLst>
+                                    <p:cond delay="0"/>
+                                  </p:stCondLst>
+                                  <p:childTnLst>
+                                    <p:set>
+                                      <p:cBhvr>
+                                        <p:cTn id="46" dur="1" fill="hold">
+                                          <p:stCondLst>
+                                            <p:cond delay="0"/>
+                                          </p:stCondLst>
+                                        </p:cTn>
+                                        <p:tgtEl>
+                                          <p:spTgt spid="40">
+                                            <p:txEl>
+                                              <p:pRg st="1" end="1"/>
+                                            </p:txEl>
+                                          </p:spTgt>
+                                        </p:tgtEl>
+                                        <p:attrNameLst>
+                                          <p:attrName>style.visibility</p:attrName>
+                                        </p:attrNameLst>
+                                      </p:cBhvr>
+                                      <p:to>
+                                        <p:strVal val="visible"/>
+                                      </p:to>
+                                    </p:set>
+                                    <p:anim calcmode="lin" valueType="num">
+                                      <p:cBhvr additive="base">
+                                        <p:cTn id="47" dur="500" fill="hold"/>
+                                        <p:tgtEl>
+                                          <p:spTgt spid="40">
+                                            <p:txEl>
+                                              <p:pRg st="1" end="1"/>
+                                            </p:txEl>
+                                          </p:spTgt>
+                                        </p:tgtEl>
+                                        <p:attrNameLst>
+                                          <p:attrName>ppt_x</p:attrName>
+                                        </p:attrNameLst>
+                                      </p:cBhvr>
+                                      <p:tavLst>
+                                        <p:tav tm="0">
+                                          <p:val>
+                                            <p:strVal val="#ppt_x"/>
+                                          </p:val>
+                                        </p:tav>
+                                        <p:tav tm="100000">
+                                          <p:val>
+                                            <p:strVal val="#ppt_x"/>
+                                          </p:val>
+                                        </p:tav>
+                                      </p:tavLst>
+                                    </p:anim>
+                                    <p:anim calcmode="lin" valueType="num">
+                                      <p:cBhvr additive="base">
+                                        <p:cTn id="48" dur="500" fill="hold"/>
+                                        <p:tgtEl>
+                                          <p:spTgt spid="40">
+                                            <p:txEl>
+                                              <p:pRg st="1" end="1"/>
+                                            </p:txEl>
+                                          </p:spTgt>
+                                        </p:tgtEl>
+                                        <p:attrNameLst>
+                                          <p:attrName>ppt_y</p:attrName>
+                                        </p:attrNameLst>
+                                      </p:cBhvr>
+                                      <p:tavLst>
+                                        <p:tav tm="0">
+                                          <p:val>
+                                            <p:strVal val="1+#ppt_h/2"/>
+                                          </p:val>
+                                        </p:tav>
+                                        <p:tav tm="100000">
+                                          <p:val>
+                                            <p:strVal val="#ppt_y"/>
+                                          </p:val>
+                                        </p:tav>
+                                      </p:tavLst>
+                                    </p:anim>
+                                  </p:childTnLst>
+                                </p:cTn>
+                              </p:par>
+                              <p:par>
+                                <p:cTn id="49" presetID="2" presetClass="entr" presetSubtype="4" fill="hold" nodeType="withEffect">
+                                  <p:stCondLst>
+                                    <p:cond delay="0"/>
+                                  </p:stCondLst>
+                                  <p:childTnLst>
+                                    <p:set>
+                                      <p:cBhvr>
+                                        <p:cTn id="50" dur="1" fill="hold">
+                                          <p:stCondLst>
+                                            <p:cond delay="0"/>
+                                          </p:stCondLst>
+                                        </p:cTn>
+                                        <p:tgtEl>
+                                          <p:spTgt spid="40">
+                                            <p:txEl>
+                                              <p:pRg st="2" end="2"/>
+                                            </p:txEl>
+                                          </p:spTgt>
+                                        </p:tgtEl>
+                                        <p:attrNameLst>
+                                          <p:attrName>style.visibility</p:attrName>
+                                        </p:attrNameLst>
+                                      </p:cBhvr>
+                                      <p:to>
+                                        <p:strVal val="visible"/>
+                                      </p:to>
+                                    </p:set>
+                                    <p:anim calcmode="lin" valueType="num">
+                                      <p:cBhvr additive="base">
+                                        <p:cTn id="51" dur="500" fill="hold"/>
+                                        <p:tgtEl>
+                                          <p:spTgt spid="40">
+                                            <p:txEl>
+                                              <p:pRg st="2" end="2"/>
+                                            </p:txEl>
+                                          </p:spTgt>
+                                        </p:tgtEl>
+                                        <p:attrNameLst>
+                                          <p:attrName>ppt_x</p:attrName>
+                                        </p:attrNameLst>
+                                      </p:cBhvr>
+                                      <p:tavLst>
+                                        <p:tav tm="0">
+                                          <p:val>
+                                            <p:strVal val="#ppt_x"/>
+                                          </p:val>
+                                        </p:tav>
+                                        <p:tav tm="100000">
+                                          <p:val>
+                                            <p:strVal val="#ppt_x"/>
+                                          </p:val>
+                                        </p:tav>
+                                      </p:tavLst>
+                                    </p:anim>
+                                    <p:anim calcmode="lin" valueType="num">
+                                      <p:cBhvr additive="base">
+                                        <p:cTn id="52" dur="500" fill="hold"/>
+                                        <p:tgtEl>
+                                          <p:spTgt spid="40">
+                                            <p:txEl>
+                                              <p:pRg st="2" end="2"/>
+                                            </p:txEl>
+                                          </p:spTgt>
+                                        </p:tgtEl>
+                                        <p:attrNameLst>
+                                          <p:attrName>ppt_y</p:attrName>
+                                        </p:attrNameLst>
+                                      </p:cBhvr>
+                                      <p:tavLst>
+                                        <p:tav tm="0">
+                                          <p:val>
+                                            <p:strVal val="1+#ppt_h/2"/>
+                                          </p:val>
+                                        </p:tav>
+                                        <p:tav tm="100000">
+                                          <p:val>
+                                            <p:strVal val="#ppt_y"/>
+                                          </p:val>
+                                        </p:tav>
+                                      </p:tavLst>
+                                    </p:anim>
+                                  </p:childTnLst>
+                                </p:cTn>
+                              </p:par>
+                              <p:par>
+                                <p:cTn id="53" presetID="2" presetClass="entr" presetSubtype="4" fill="hold" nodeType="withEffect">
+                                  <p:stCondLst>
+                                    <p:cond delay="0"/>
+                                  </p:stCondLst>
+                                  <p:childTnLst>
+                                    <p:set>
+                                      <p:cBhvr>
+                                        <p:cTn id="54" dur="1" fill="hold">
+                                          <p:stCondLst>
+                                            <p:cond delay="0"/>
+                                          </p:stCondLst>
+                                        </p:cTn>
+                                        <p:tgtEl>
+                                          <p:spTgt spid="40">
+                                            <p:txEl>
+                                              <p:pRg st="3" end="3"/>
+                                            </p:txEl>
+                                          </p:spTgt>
+                                        </p:tgtEl>
+                                        <p:attrNameLst>
+                                          <p:attrName>style.visibility</p:attrName>
+                                        </p:attrNameLst>
+                                      </p:cBhvr>
+                                      <p:to>
+                                        <p:strVal val="visible"/>
+                                      </p:to>
+                                    </p:set>
+                                    <p:anim calcmode="lin" valueType="num">
+                                      <p:cBhvr additive="base">
+                                        <p:cTn id="55" dur="500" fill="hold"/>
+                                        <p:tgtEl>
+                                          <p:spTgt spid="40">
+                                            <p:txEl>
+                                              <p:pRg st="3" end="3"/>
+                                            </p:txEl>
+                                          </p:spTgt>
+                                        </p:tgtEl>
+                                        <p:attrNameLst>
+                                          <p:attrName>ppt_x</p:attrName>
+                                        </p:attrNameLst>
+                                      </p:cBhvr>
+                                      <p:tavLst>
+                                        <p:tav tm="0">
+                                          <p:val>
+                                            <p:strVal val="#ppt_x"/>
+                                          </p:val>
+                                        </p:tav>
+                                        <p:tav tm="100000">
+                                          <p:val>
+                                            <p:strVal val="#ppt_x"/>
+                                          </p:val>
+                                        </p:tav>
+                                      </p:tavLst>
+                                    </p:anim>
+                                    <p:anim calcmode="lin" valueType="num">
+                                      <p:cBhvr additive="base">
+                                        <p:cTn id="56" dur="500" fill="hold"/>
+                                        <p:tgtEl>
+                                          <p:spTgt spid="40">
+                                            <p:txEl>
+                                              <p:pRg st="3" end="3"/>
+                                            </p:txEl>
+                                          </p:spTgt>
+                                        </p:tgtEl>
+                                        <p:attrNameLst>
+                                          <p:attrName>ppt_y</p:attrName>
+                                        </p:attrNameLst>
+                                      </p:cBhvr>
+                                      <p:tavLst>
+                                        <p:tav tm="0">
+                                          <p:val>
+                                            <p:strVal val="1+#ppt_h/2"/>
+                                          </p:val>
+                                        </p:tav>
+                                        <p:tav tm="100000">
+                                          <p:val>
+                                            <p:strVal val="#ppt_y"/>
+                                          </p:val>
+                                        </p:tav>
+                                      </p:tavLst>
+                                    </p:anim>
+                                  </p:childTnLst>
+                                </p:cTn>
+                              </p:par>
+                            </p:childTnLst>
+                          </p:cTn>
+                        </p:par>
+                      </p:childTnLst>
+                    </p:cTn>
+                  </p:par>
+                </p:childTnLst>
+              </p:cTn>
+              <p:prevCondLst>
+                <p:cond evt="onPrev" delay="0">
+                  <p:tgtEl>
+                    <p:sldTgt/>
+                  </p:tgtEl>
+                </p:cond>
+              </p:prevCondLst>
+              <p:nextCondLst>
+                <p:cond evt="onNext" delay="0">
+                  <p:tgtEl>
+                    <p:sldTgt/>
+                  </p:tgtEl>
+                </p:cond>
+              </p:nextCondLst>
+            </p:seq>
+          </p:childTnLst>
+        </p:cTn>
+      </p:par>
+    </p:tnLst>
+  </p:timing>
 </p:sld>
 </file>
 
@@ -10629,7 +14583,7 @@
         <p:spPr>
           <a:xfrm>
             <a:off x="2463987" y="1423026"/>
-            <a:ext cx="6138150" cy="4154984"/>
+            <a:ext cx="6138150" cy="2677656"/>
           </a:xfrm>
           <a:prstGeom prst="rect">
             <a:avLst/>
@@ -10689,38 +14643,6 @@
               </a:rPr>
               <a:t>Hegedűs Kevin: Komplex működés és oldalfelépítés</a:t>
             </a:r>
-          </a:p>
-          <a:p>
-            <a:endParaRPr lang="hu-HU" sz="2400" dirty="0">
-              <a:solidFill>
-                <a:srgbClr val="464637"/>
-              </a:solidFill>
-              <a:latin typeface="Book Antiqua" panose="02040602050305030304" pitchFamily="18" charset="0"/>
-            </a:endParaRPr>
-          </a:p>
-          <a:p>
-            <a:endParaRPr lang="hu-HU" sz="2400" dirty="0">
-              <a:solidFill>
-                <a:srgbClr val="464637"/>
-              </a:solidFill>
-              <a:latin typeface="Book Antiqua" panose="02040602050305030304" pitchFamily="18" charset="0"/>
-            </a:endParaRPr>
-          </a:p>
-          <a:p>
-            <a:endParaRPr lang="hu-HU" sz="2400" dirty="0">
-              <a:solidFill>
-                <a:srgbClr val="464637"/>
-              </a:solidFill>
-              <a:latin typeface="Book Antiqua" panose="02040602050305030304" pitchFamily="18" charset="0"/>
-            </a:endParaRPr>
-          </a:p>
-          <a:p>
-            <a:endParaRPr lang="hu-HU" sz="2400" dirty="0">
-              <a:solidFill>
-                <a:srgbClr val="464637"/>
-              </a:solidFill>
-              <a:latin typeface="Book Antiqua" panose="02040602050305030304" pitchFamily="18" charset="0"/>
-            </a:endParaRPr>
           </a:p>
         </p:txBody>
       </p:sp>
@@ -10794,18 +14716,701 @@
   <p:clrMapOvr>
     <a:masterClrMapping/>
   </p:clrMapOvr>
-  <mc:AlternateContent xmlns:mc="http://schemas.openxmlformats.org/markup-compatibility/2006">
-    <mc:Choice xmlns:p159="http://schemas.microsoft.com/office/powerpoint/2015/09/main" Requires="p159">
+  <mc:AlternateContent xmlns:mc="http://schemas.openxmlformats.org/markup-compatibility/2006" xmlns:p159="http://schemas.microsoft.com/office/powerpoint/2015/09/main">
+    <mc:Choice Requires="p159">
       <p:transition xmlns:p14="http://schemas.microsoft.com/office/powerpoint/2010/main" spd="slow" p14:dur="2000">
         <p159:morph option="byChar"/>
       </p:transition>
     </mc:Choice>
-    <mc:Fallback>
+    <mc:Fallback xmlns="">
       <p:transition spd="slow">
         <p:fade/>
       </p:transition>
     </mc:Fallback>
   </mc:AlternateContent>
+  <p:timing>
+    <p:tnLst>
+      <p:par>
+        <p:cTn id="1" dur="indefinite" restart="never" nodeType="tmRoot">
+          <p:childTnLst>
+            <p:seq concurrent="1" nextAc="seek">
+              <p:cTn id="2" dur="indefinite" nodeType="mainSeq">
+                <p:childTnLst>
+                  <p:par>
+                    <p:cTn id="3" fill="hold">
+                      <p:stCondLst>
+                        <p:cond delay="indefinite"/>
+                      </p:stCondLst>
+                      <p:childTnLst>
+                        <p:par>
+                          <p:cTn id="4" fill="hold">
+                            <p:stCondLst>
+                              <p:cond delay="0"/>
+                            </p:stCondLst>
+                            <p:childTnLst>
+                              <p:par>
+                                <p:cTn id="5" presetID="10" presetClass="entr" presetSubtype="0" fill="hold" nodeType="clickEffect">
+                                  <p:stCondLst>
+                                    <p:cond delay="0"/>
+                                  </p:stCondLst>
+                                  <p:childTnLst>
+                                    <p:set>
+                                      <p:cBhvr>
+                                        <p:cTn id="6" dur="1" fill="hold">
+                                          <p:stCondLst>
+                                            <p:cond delay="0"/>
+                                          </p:stCondLst>
+                                        </p:cTn>
+                                        <p:tgtEl>
+                                          <p:spTgt spid="5">
+                                            <p:txEl>
+                                              <p:pRg st="0" end="0"/>
+                                            </p:txEl>
+                                          </p:spTgt>
+                                        </p:tgtEl>
+                                        <p:attrNameLst>
+                                          <p:attrName>style.visibility</p:attrName>
+                                        </p:attrNameLst>
+                                      </p:cBhvr>
+                                      <p:to>
+                                        <p:strVal val="visible"/>
+                                      </p:to>
+                                    </p:set>
+                                    <p:animEffect transition="in" filter="fade">
+                                      <p:cBhvr>
+                                        <p:cTn id="7" dur="500"/>
+                                        <p:tgtEl>
+                                          <p:spTgt spid="5">
+                                            <p:txEl>
+                                              <p:pRg st="0" end="0"/>
+                                            </p:txEl>
+                                          </p:spTgt>
+                                        </p:tgtEl>
+                                      </p:cBhvr>
+                                    </p:animEffect>
+                                  </p:childTnLst>
+                                </p:cTn>
+                              </p:par>
+                            </p:childTnLst>
+                          </p:cTn>
+                        </p:par>
+                        <p:par>
+                          <p:cTn id="8" fill="hold">
+                            <p:stCondLst>
+                              <p:cond delay="500"/>
+                            </p:stCondLst>
+                            <p:childTnLst>
+                              <p:par>
+                                <p:cTn id="9" presetID="2" presetClass="entr" presetSubtype="8" fill="hold" nodeType="afterEffect">
+                                  <p:stCondLst>
+                                    <p:cond delay="0"/>
+                                  </p:stCondLst>
+                                  <p:childTnLst>
+                                    <p:set>
+                                      <p:cBhvr>
+                                        <p:cTn id="10" dur="1" fill="hold">
+                                          <p:stCondLst>
+                                            <p:cond delay="0"/>
+                                          </p:stCondLst>
+                                        </p:cTn>
+                                        <p:tgtEl>
+                                          <p:spTgt spid="18">
+                                            <p:txEl>
+                                              <p:pRg st="0" end="0"/>
+                                            </p:txEl>
+                                          </p:spTgt>
+                                        </p:tgtEl>
+                                        <p:attrNameLst>
+                                          <p:attrName>style.visibility</p:attrName>
+                                        </p:attrNameLst>
+                                      </p:cBhvr>
+                                      <p:to>
+                                        <p:strVal val="visible"/>
+                                      </p:to>
+                                    </p:set>
+                                    <p:anim calcmode="lin" valueType="num">
+                                      <p:cBhvr additive="base">
+                                        <p:cTn id="11" dur="500" fill="hold"/>
+                                        <p:tgtEl>
+                                          <p:spTgt spid="18">
+                                            <p:txEl>
+                                              <p:pRg st="0" end="0"/>
+                                            </p:txEl>
+                                          </p:spTgt>
+                                        </p:tgtEl>
+                                        <p:attrNameLst>
+                                          <p:attrName>ppt_x</p:attrName>
+                                        </p:attrNameLst>
+                                      </p:cBhvr>
+                                      <p:tavLst>
+                                        <p:tav tm="0">
+                                          <p:val>
+                                            <p:strVal val="0-#ppt_w/2"/>
+                                          </p:val>
+                                        </p:tav>
+                                        <p:tav tm="100000">
+                                          <p:val>
+                                            <p:strVal val="#ppt_x"/>
+                                          </p:val>
+                                        </p:tav>
+                                      </p:tavLst>
+                                    </p:anim>
+                                    <p:anim calcmode="lin" valueType="num">
+                                      <p:cBhvr additive="base">
+                                        <p:cTn id="12" dur="500" fill="hold"/>
+                                        <p:tgtEl>
+                                          <p:spTgt spid="18">
+                                            <p:txEl>
+                                              <p:pRg st="0" end="0"/>
+                                            </p:txEl>
+                                          </p:spTgt>
+                                        </p:tgtEl>
+                                        <p:attrNameLst>
+                                          <p:attrName>ppt_y</p:attrName>
+                                        </p:attrNameLst>
+                                      </p:cBhvr>
+                                      <p:tavLst>
+                                        <p:tav tm="0">
+                                          <p:val>
+                                            <p:strVal val="#ppt_y"/>
+                                          </p:val>
+                                        </p:tav>
+                                        <p:tav tm="100000">
+                                          <p:val>
+                                            <p:strVal val="#ppt_y"/>
+                                          </p:val>
+                                        </p:tav>
+                                      </p:tavLst>
+                                    </p:anim>
+                                  </p:childTnLst>
+                                </p:cTn>
+                              </p:par>
+                            </p:childTnLst>
+                          </p:cTn>
+                        </p:par>
+                        <p:par>
+                          <p:cTn id="13" fill="hold">
+                            <p:stCondLst>
+                              <p:cond delay="1000"/>
+                            </p:stCondLst>
+                            <p:childTnLst>
+                              <p:par>
+                                <p:cTn id="14" presetID="2" presetClass="entr" presetSubtype="8" fill="hold" nodeType="afterEffect">
+                                  <p:stCondLst>
+                                    <p:cond delay="0"/>
+                                  </p:stCondLst>
+                                  <p:childTnLst>
+                                    <p:set>
+                                      <p:cBhvr>
+                                        <p:cTn id="15" dur="1" fill="hold">
+                                          <p:stCondLst>
+                                            <p:cond delay="0"/>
+                                          </p:stCondLst>
+                                        </p:cTn>
+                                        <p:tgtEl>
+                                          <p:spTgt spid="18">
+                                            <p:txEl>
+                                              <p:pRg st="1" end="1"/>
+                                            </p:txEl>
+                                          </p:spTgt>
+                                        </p:tgtEl>
+                                        <p:attrNameLst>
+                                          <p:attrName>style.visibility</p:attrName>
+                                        </p:attrNameLst>
+                                      </p:cBhvr>
+                                      <p:to>
+                                        <p:strVal val="visible"/>
+                                      </p:to>
+                                    </p:set>
+                                    <p:anim calcmode="lin" valueType="num">
+                                      <p:cBhvr additive="base">
+                                        <p:cTn id="16" dur="500" fill="hold"/>
+                                        <p:tgtEl>
+                                          <p:spTgt spid="18">
+                                            <p:txEl>
+                                              <p:pRg st="1" end="1"/>
+                                            </p:txEl>
+                                          </p:spTgt>
+                                        </p:tgtEl>
+                                        <p:attrNameLst>
+                                          <p:attrName>ppt_x</p:attrName>
+                                        </p:attrNameLst>
+                                      </p:cBhvr>
+                                      <p:tavLst>
+                                        <p:tav tm="0">
+                                          <p:val>
+                                            <p:strVal val="0-#ppt_w/2"/>
+                                          </p:val>
+                                        </p:tav>
+                                        <p:tav tm="100000">
+                                          <p:val>
+                                            <p:strVal val="#ppt_x"/>
+                                          </p:val>
+                                        </p:tav>
+                                      </p:tavLst>
+                                    </p:anim>
+                                    <p:anim calcmode="lin" valueType="num">
+                                      <p:cBhvr additive="base">
+                                        <p:cTn id="17" dur="500" fill="hold"/>
+                                        <p:tgtEl>
+                                          <p:spTgt spid="18">
+                                            <p:txEl>
+                                              <p:pRg st="1" end="1"/>
+                                            </p:txEl>
+                                          </p:spTgt>
+                                        </p:tgtEl>
+                                        <p:attrNameLst>
+                                          <p:attrName>ppt_y</p:attrName>
+                                        </p:attrNameLst>
+                                      </p:cBhvr>
+                                      <p:tavLst>
+                                        <p:tav tm="0">
+                                          <p:val>
+                                            <p:strVal val="#ppt_y"/>
+                                          </p:val>
+                                        </p:tav>
+                                        <p:tav tm="100000">
+                                          <p:val>
+                                            <p:strVal val="#ppt_y"/>
+                                          </p:val>
+                                        </p:tav>
+                                      </p:tavLst>
+                                    </p:anim>
+                                  </p:childTnLst>
+                                </p:cTn>
+                              </p:par>
+                            </p:childTnLst>
+                          </p:cTn>
+                        </p:par>
+                        <p:par>
+                          <p:cTn id="18" fill="hold">
+                            <p:stCondLst>
+                              <p:cond delay="1500"/>
+                            </p:stCondLst>
+                            <p:childTnLst>
+                              <p:par>
+                                <p:cTn id="19" presetID="2" presetClass="entr" presetSubtype="8" fill="hold" nodeType="afterEffect">
+                                  <p:stCondLst>
+                                    <p:cond delay="0"/>
+                                  </p:stCondLst>
+                                  <p:childTnLst>
+                                    <p:set>
+                                      <p:cBhvr>
+                                        <p:cTn id="20" dur="1" fill="hold">
+                                          <p:stCondLst>
+                                            <p:cond delay="0"/>
+                                          </p:stCondLst>
+                                        </p:cTn>
+                                        <p:tgtEl>
+                                          <p:spTgt spid="18">
+                                            <p:txEl>
+                                              <p:pRg st="2" end="2"/>
+                                            </p:txEl>
+                                          </p:spTgt>
+                                        </p:tgtEl>
+                                        <p:attrNameLst>
+                                          <p:attrName>style.visibility</p:attrName>
+                                        </p:attrNameLst>
+                                      </p:cBhvr>
+                                      <p:to>
+                                        <p:strVal val="visible"/>
+                                      </p:to>
+                                    </p:set>
+                                    <p:anim calcmode="lin" valueType="num">
+                                      <p:cBhvr additive="base">
+                                        <p:cTn id="21" dur="500" fill="hold"/>
+                                        <p:tgtEl>
+                                          <p:spTgt spid="18">
+                                            <p:txEl>
+                                              <p:pRg st="2" end="2"/>
+                                            </p:txEl>
+                                          </p:spTgt>
+                                        </p:tgtEl>
+                                        <p:attrNameLst>
+                                          <p:attrName>ppt_x</p:attrName>
+                                        </p:attrNameLst>
+                                      </p:cBhvr>
+                                      <p:tavLst>
+                                        <p:tav tm="0">
+                                          <p:val>
+                                            <p:strVal val="0-#ppt_w/2"/>
+                                          </p:val>
+                                        </p:tav>
+                                        <p:tav tm="100000">
+                                          <p:val>
+                                            <p:strVal val="#ppt_x"/>
+                                          </p:val>
+                                        </p:tav>
+                                      </p:tavLst>
+                                    </p:anim>
+                                    <p:anim calcmode="lin" valueType="num">
+                                      <p:cBhvr additive="base">
+                                        <p:cTn id="22" dur="500" fill="hold"/>
+                                        <p:tgtEl>
+                                          <p:spTgt spid="18">
+                                            <p:txEl>
+                                              <p:pRg st="2" end="2"/>
+                                            </p:txEl>
+                                          </p:spTgt>
+                                        </p:tgtEl>
+                                        <p:attrNameLst>
+                                          <p:attrName>ppt_y</p:attrName>
+                                        </p:attrNameLst>
+                                      </p:cBhvr>
+                                      <p:tavLst>
+                                        <p:tav tm="0">
+                                          <p:val>
+                                            <p:strVal val="#ppt_y"/>
+                                          </p:val>
+                                        </p:tav>
+                                        <p:tav tm="100000">
+                                          <p:val>
+                                            <p:strVal val="#ppt_y"/>
+                                          </p:val>
+                                        </p:tav>
+                                      </p:tavLst>
+                                    </p:anim>
+                                  </p:childTnLst>
+                                </p:cTn>
+                              </p:par>
+                            </p:childTnLst>
+                          </p:cTn>
+                        </p:par>
+                      </p:childTnLst>
+                    </p:cTn>
+                  </p:par>
+                  <p:par>
+                    <p:cTn id="23" fill="hold">
+                      <p:stCondLst>
+                        <p:cond delay="indefinite"/>
+                      </p:stCondLst>
+                      <p:childTnLst>
+                        <p:par>
+                          <p:cTn id="24" fill="hold">
+                            <p:stCondLst>
+                              <p:cond delay="0"/>
+                            </p:stCondLst>
+                            <p:childTnLst>
+                              <p:par>
+                                <p:cTn id="25" presetID="10" presetClass="entr" presetSubtype="0" fill="hold" nodeType="clickEffect">
+                                  <p:stCondLst>
+                                    <p:cond delay="0"/>
+                                  </p:stCondLst>
+                                  <p:childTnLst>
+                                    <p:set>
+                                      <p:cBhvr>
+                                        <p:cTn id="26" dur="1" fill="hold">
+                                          <p:stCondLst>
+                                            <p:cond delay="0"/>
+                                          </p:stCondLst>
+                                        </p:cTn>
+                                        <p:tgtEl>
+                                          <p:spTgt spid="13">
+                                            <p:txEl>
+                                              <p:pRg st="0" end="0"/>
+                                            </p:txEl>
+                                          </p:spTgt>
+                                        </p:tgtEl>
+                                        <p:attrNameLst>
+                                          <p:attrName>style.visibility</p:attrName>
+                                        </p:attrNameLst>
+                                      </p:cBhvr>
+                                      <p:to>
+                                        <p:strVal val="visible"/>
+                                      </p:to>
+                                    </p:set>
+                                    <p:animEffect transition="in" filter="fade">
+                                      <p:cBhvr>
+                                        <p:cTn id="27" dur="500"/>
+                                        <p:tgtEl>
+                                          <p:spTgt spid="13">
+                                            <p:txEl>
+                                              <p:pRg st="0" end="0"/>
+                                            </p:txEl>
+                                          </p:spTgt>
+                                        </p:tgtEl>
+                                      </p:cBhvr>
+                                    </p:animEffect>
+                                  </p:childTnLst>
+                                </p:cTn>
+                              </p:par>
+                            </p:childTnLst>
+                          </p:cTn>
+                        </p:par>
+                        <p:par>
+                          <p:cTn id="28" fill="hold">
+                            <p:stCondLst>
+                              <p:cond delay="500"/>
+                            </p:stCondLst>
+                            <p:childTnLst>
+                              <p:par>
+                                <p:cTn id="29" presetID="2" presetClass="entr" presetSubtype="4" fill="hold" nodeType="afterEffect">
+                                  <p:stCondLst>
+                                    <p:cond delay="0"/>
+                                  </p:stCondLst>
+                                  <p:childTnLst>
+                                    <p:set>
+                                      <p:cBhvr>
+                                        <p:cTn id="30" dur="1" fill="hold">
+                                          <p:stCondLst>
+                                            <p:cond delay="0"/>
+                                          </p:stCondLst>
+                                        </p:cTn>
+                                        <p:tgtEl>
+                                          <p:spTgt spid="7">
+                                            <p:txEl>
+                                              <p:pRg st="0" end="0"/>
+                                            </p:txEl>
+                                          </p:spTgt>
+                                        </p:tgtEl>
+                                        <p:attrNameLst>
+                                          <p:attrName>style.visibility</p:attrName>
+                                        </p:attrNameLst>
+                                      </p:cBhvr>
+                                      <p:to>
+                                        <p:strVal val="visible"/>
+                                      </p:to>
+                                    </p:set>
+                                    <p:anim calcmode="lin" valueType="num">
+                                      <p:cBhvr additive="base">
+                                        <p:cTn id="31" dur="500" fill="hold"/>
+                                        <p:tgtEl>
+                                          <p:spTgt spid="7">
+                                            <p:txEl>
+                                              <p:pRg st="0" end="0"/>
+                                            </p:txEl>
+                                          </p:spTgt>
+                                        </p:tgtEl>
+                                        <p:attrNameLst>
+                                          <p:attrName>ppt_x</p:attrName>
+                                        </p:attrNameLst>
+                                      </p:cBhvr>
+                                      <p:tavLst>
+                                        <p:tav tm="0">
+                                          <p:val>
+                                            <p:strVal val="#ppt_x"/>
+                                          </p:val>
+                                        </p:tav>
+                                        <p:tav tm="100000">
+                                          <p:val>
+                                            <p:strVal val="#ppt_x"/>
+                                          </p:val>
+                                        </p:tav>
+                                      </p:tavLst>
+                                    </p:anim>
+                                    <p:anim calcmode="lin" valueType="num">
+                                      <p:cBhvr additive="base">
+                                        <p:cTn id="32" dur="500" fill="hold"/>
+                                        <p:tgtEl>
+                                          <p:spTgt spid="7">
+                                            <p:txEl>
+                                              <p:pRg st="0" end="0"/>
+                                            </p:txEl>
+                                          </p:spTgt>
+                                        </p:tgtEl>
+                                        <p:attrNameLst>
+                                          <p:attrName>ppt_y</p:attrName>
+                                        </p:attrNameLst>
+                                      </p:cBhvr>
+                                      <p:tavLst>
+                                        <p:tav tm="0">
+                                          <p:val>
+                                            <p:strVal val="1+#ppt_h/2"/>
+                                          </p:val>
+                                        </p:tav>
+                                        <p:tav tm="100000">
+                                          <p:val>
+                                            <p:strVal val="#ppt_y"/>
+                                          </p:val>
+                                        </p:tav>
+                                      </p:tavLst>
+                                    </p:anim>
+                                  </p:childTnLst>
+                                </p:cTn>
+                              </p:par>
+                            </p:childTnLst>
+                          </p:cTn>
+                        </p:par>
+                      </p:childTnLst>
+                    </p:cTn>
+                  </p:par>
+                  <p:par>
+                    <p:cTn id="33" fill="hold">
+                      <p:stCondLst>
+                        <p:cond delay="indefinite"/>
+                      </p:stCondLst>
+                      <p:childTnLst>
+                        <p:par>
+                          <p:cTn id="34" fill="hold">
+                            <p:stCondLst>
+                              <p:cond delay="0"/>
+                            </p:stCondLst>
+                            <p:childTnLst>
+                              <p:par>
+                                <p:cTn id="35" presetID="10" presetClass="entr" presetSubtype="0" fill="hold" nodeType="clickEffect">
+                                  <p:stCondLst>
+                                    <p:cond delay="0"/>
+                                  </p:stCondLst>
+                                  <p:childTnLst>
+                                    <p:set>
+                                      <p:cBhvr>
+                                        <p:cTn id="36" dur="1" fill="hold">
+                                          <p:stCondLst>
+                                            <p:cond delay="0"/>
+                                          </p:stCondLst>
+                                        </p:cTn>
+                                        <p:tgtEl>
+                                          <p:spTgt spid="10">
+                                            <p:txEl>
+                                              <p:pRg st="0" end="0"/>
+                                            </p:txEl>
+                                          </p:spTgt>
+                                        </p:tgtEl>
+                                        <p:attrNameLst>
+                                          <p:attrName>style.visibility</p:attrName>
+                                        </p:attrNameLst>
+                                      </p:cBhvr>
+                                      <p:to>
+                                        <p:strVal val="visible"/>
+                                      </p:to>
+                                    </p:set>
+                                    <p:animEffect transition="in" filter="fade">
+                                      <p:cBhvr>
+                                        <p:cTn id="37" dur="500"/>
+                                        <p:tgtEl>
+                                          <p:spTgt spid="10">
+                                            <p:txEl>
+                                              <p:pRg st="0" end="0"/>
+                                            </p:txEl>
+                                          </p:spTgt>
+                                        </p:tgtEl>
+                                      </p:cBhvr>
+                                    </p:animEffect>
+                                  </p:childTnLst>
+                                </p:cTn>
+                              </p:par>
+                            </p:childTnLst>
+                          </p:cTn>
+                        </p:par>
+                        <p:par>
+                          <p:cTn id="38" fill="hold">
+                            <p:stCondLst>
+                              <p:cond delay="500"/>
+                            </p:stCondLst>
+                            <p:childTnLst>
+                              <p:par>
+                                <p:cTn id="39" presetID="2" presetClass="entr" presetSubtype="4" fill="hold" nodeType="afterEffect">
+                                  <p:stCondLst>
+                                    <p:cond delay="0"/>
+                                  </p:stCondLst>
+                                  <p:childTnLst>
+                                    <p:set>
+                                      <p:cBhvr>
+                                        <p:cTn id="40" dur="1" fill="hold">
+                                          <p:stCondLst>
+                                            <p:cond delay="0"/>
+                                          </p:stCondLst>
+                                        </p:cTn>
+                                        <p:tgtEl>
+                                          <p:spTgt spid="14">
+                                            <p:txEl>
+                                              <p:pRg st="0" end="0"/>
+                                            </p:txEl>
+                                          </p:spTgt>
+                                        </p:tgtEl>
+                                        <p:attrNameLst>
+                                          <p:attrName>style.visibility</p:attrName>
+                                        </p:attrNameLst>
+                                      </p:cBhvr>
+                                      <p:to>
+                                        <p:strVal val="visible"/>
+                                      </p:to>
+                                    </p:set>
+                                    <p:anim calcmode="lin" valueType="num">
+                                      <p:cBhvr additive="base">
+                                        <p:cTn id="41" dur="500" fill="hold"/>
+                                        <p:tgtEl>
+                                          <p:spTgt spid="14">
+                                            <p:txEl>
+                                              <p:pRg st="0" end="0"/>
+                                            </p:txEl>
+                                          </p:spTgt>
+                                        </p:tgtEl>
+                                        <p:attrNameLst>
+                                          <p:attrName>ppt_x</p:attrName>
+                                        </p:attrNameLst>
+                                      </p:cBhvr>
+                                      <p:tavLst>
+                                        <p:tav tm="0">
+                                          <p:val>
+                                            <p:strVal val="#ppt_x"/>
+                                          </p:val>
+                                        </p:tav>
+                                        <p:tav tm="100000">
+                                          <p:val>
+                                            <p:strVal val="#ppt_x"/>
+                                          </p:val>
+                                        </p:tav>
+                                      </p:tavLst>
+                                    </p:anim>
+                                    <p:anim calcmode="lin" valueType="num">
+                                      <p:cBhvr additive="base">
+                                        <p:cTn id="42" dur="500" fill="hold"/>
+                                        <p:tgtEl>
+                                          <p:spTgt spid="14">
+                                            <p:txEl>
+                                              <p:pRg st="0" end="0"/>
+                                            </p:txEl>
+                                          </p:spTgt>
+                                        </p:tgtEl>
+                                        <p:attrNameLst>
+                                          <p:attrName>ppt_y</p:attrName>
+                                        </p:attrNameLst>
+                                      </p:cBhvr>
+                                      <p:tavLst>
+                                        <p:tav tm="0">
+                                          <p:val>
+                                            <p:strVal val="1+#ppt_h/2"/>
+                                          </p:val>
+                                        </p:tav>
+                                        <p:tav tm="100000">
+                                          <p:val>
+                                            <p:strVal val="#ppt_y"/>
+                                          </p:val>
+                                        </p:tav>
+                                      </p:tavLst>
+                                    </p:anim>
+                                  </p:childTnLst>
+                                </p:cTn>
+                              </p:par>
+                            </p:childTnLst>
+                          </p:cTn>
+                        </p:par>
+                      </p:childTnLst>
+                    </p:cTn>
+                  </p:par>
+                </p:childTnLst>
+              </p:cTn>
+              <p:prevCondLst>
+                <p:cond evt="onPrev" delay="0">
+                  <p:tgtEl>
+                    <p:sldTgt/>
+                  </p:tgtEl>
+                </p:cond>
+              </p:prevCondLst>
+              <p:nextCondLst>
+                <p:cond evt="onNext" delay="0">
+                  <p:tgtEl>
+                    <p:sldTgt/>
+                  </p:tgtEl>
+                </p:cond>
+              </p:nextCondLst>
+            </p:seq>
+          </p:childTnLst>
+        </p:cTn>
+      </p:par>
+    </p:tnLst>
+  </p:timing>
 </p:sld>
 </file>
 
@@ -11290,13 +15895,13 @@
   <p:clrMapOvr>
     <a:masterClrMapping/>
   </p:clrMapOvr>
-  <mc:AlternateContent xmlns:mc="http://schemas.openxmlformats.org/markup-compatibility/2006">
-    <mc:Choice xmlns:p159="http://schemas.microsoft.com/office/powerpoint/2015/09/main" Requires="p159">
+  <mc:AlternateContent xmlns:mc="http://schemas.openxmlformats.org/markup-compatibility/2006" xmlns:p159="http://schemas.microsoft.com/office/powerpoint/2015/09/main">
+    <mc:Choice Requires="p159">
       <p:transition xmlns:p14="http://schemas.microsoft.com/office/powerpoint/2010/main" spd="slow" p14:dur="2000">
         <p159:morph option="byChar"/>
       </p:transition>
     </mc:Choice>
-    <mc:Fallback>
+    <mc:Fallback xmlns="">
       <p:transition spd="slow">
         <p:fade/>
       </p:transition>
